--- a/SURA/gestores-sura/metodologia-trabajo/Tech and Solve - Dinámica de trabajo del equipo.pptx
+++ b/SURA/gestores-sura/metodologia-trabajo/Tech and Solve - Dinámica de trabajo del equipo.pptx
@@ -126,12 +126,12 @@
   <p:extLst>
     <p:ext uri="{521415D9-36F7-43E2-AB2F-B90AF26B5E84}">
       <p14:sectionLst xmlns:p14="http://schemas.microsoft.com/office/powerpoint/2010/main">
-        <p14:section name="Portada" id="{891fca09-3550-60a1-56b2-e96d203d210e}">
+        <p14:section name="Portada" id="{422a6a49-edec-beb2-1a4a-0411c34f5bf1}">
           <p14:sldIdLst>
             <p14:sldId id="256"/>
           </p14:sldIdLst>
         </p14:section>
-        <p14:section name="Dinámica de trabajo" id="{81eca443-034c-1ede-493a-3475970cec67}">
+        <p14:section name="Dinámica de trabajo" id="{11b7e2f1-4051-0f38-cbcd-6cddc0a7a96f}">
           <p14:sldIdLst>
             <p14:sldId id="257"/>
             <p14:sldId id="258"/>
@@ -148,7 +148,7 @@
             <p14:sldId id="269"/>
           </p14:sldIdLst>
         </p14:section>
-        <p14:section name="IA de Tech and Solve" id="{2d9abcd8-5726-13dd-4f52-9783a2193465}">
+        <p14:section name="IA de Tech and Solve" id="{c3917f82-1c38-b149-e93d-5057aa5d3767}">
           <p14:sldIdLst>
             <p14:sldId id="270"/>
             <p14:sldId id="271"/>
@@ -2961,7 +2961,7 @@
                   <a:schemeClr val="bg2"/>
                 </a:solidFill>
               </a:rPr>
-              <a:t>PROPUESTA PARA SURA</a:t>
+              <a:t>MÉTODO DE TRABAJO DE TECH AND SOLVE PARA SURA</a:t>
             </a:r>
             <a:endParaRPr lang="en-US" sz="1300" dirty="0"/>
           </a:p>
@@ -2976,7 +2976,7 @@
         <p:spPr>
           <a:xfrm>
             <a:off x="731520" y="2606040"/>
-            <a:ext cx="10058400" cy="960120"/>
+            <a:ext cx="10515600" cy="1600200"/>
           </a:xfrm>
           <a:prstGeom prst="rect">
             <a:avLst/>
@@ -2992,7 +2992,7 @@
               <a:buNone/>
             </a:pPr>
             <a:r>
-              <a:rPr lang="en-US" sz="5000" b="1" dirty="0">
+              <a:rPr lang="en-US" sz="4400" b="1" dirty="0">
                 <a:solidFill>
                   <a:schemeClr val="bg1"/>
                 </a:solidFill>
@@ -3000,92 +3000,48 @@
                 <a:ea typeface="+mj-lt" pitchFamily="34" charset="-122"/>
                 <a:cs typeface="+mj-lt" pitchFamily="34" charset="-120"/>
               </a:rPr>
-              <a:t>MVP de Gestores</a:t>
-            </a:r>
-            <a:endParaRPr lang="en-US" sz="5000" dirty="0"/>
-          </a:p>
-        </p:txBody>
-      </p:sp>
-      <p:sp>
-        <p:nvSpPr>
-          <p:cNvPr id="7" name="Shape 4"/>
-          <p:cNvSpPr/>
-          <p:nvPr/>
-        </p:nvSpPr>
-        <p:spPr>
-          <a:xfrm>
-            <a:off x="731520" y="3840480"/>
-            <a:ext cx="420624" cy="420624"/>
-          </a:xfrm>
-          <a:prstGeom prst="ellipse">
-            <a:avLst/>
-          </a:prstGeom>
-          <a:solidFill>
-            <a:schemeClr val="bg1"/>
-          </a:solidFill>
-          <a:ln w="12700">
-            <a:solidFill>
-              <a:schemeClr val="bg1"/>
-            </a:solidFill>
-            <a:prstDash val="solid"/>
-          </a:ln>
-        </p:spPr>
-      </p:sp>
-      <p:sp>
-        <p:nvSpPr>
-          <p:cNvPr id="8" name="Text 5"/>
+              <a:t>MVP de Gestores:</a:t>
+            </a:r>
+            <a:endParaRPr lang="en-US" sz="4400" dirty="0"/>
+          </a:p>
+          <a:p>
+            <a:pPr indent="0" marL="0">
+              <a:buNone/>
+            </a:pPr>
+            <a:r>
+              <a:rPr lang="en-US" sz="4400" b="1" dirty="0">
+                <a:solidFill>
+                  <a:schemeClr val="bg1"/>
+                </a:solidFill>
+                <a:latin typeface="+mj-lt" pitchFamily="34" charset="0"/>
+                <a:ea typeface="+mj-lt" pitchFamily="34" charset="-122"/>
+                <a:cs typeface="+mj-lt" pitchFamily="34" charset="-120"/>
+              </a:rPr>
+              <a:t>innovación para SURA</a:t>
+            </a:r>
+            <a:endParaRPr lang="en-US" sz="4400" dirty="0"/>
+          </a:p>
+        </p:txBody>
+      </p:sp>
+      <p:sp>
+        <p:nvSpPr>
+          <p:cNvPr id="7" name="Text 4"/>
           <p:cNvSpPr txBox="1"/>
           <p:nvPr/>
         </p:nvSpPr>
         <p:spPr>
           <a:xfrm>
-            <a:off x="731520" y="3840480"/>
-            <a:ext cx="420624" cy="420624"/>
-          </a:xfrm>
-          <a:prstGeom prst="rect">
-            <a:avLst/>
-          </a:prstGeom>
-          <a:noFill/>
-          <a:ln/>
-        </p:spPr>
-        <p:txBody>
-          <a:bodyPr wrap="square" lIns="0" tIns="0" rIns="0" bIns="0" rtlCol="0" anchor="ctr"/>
-          <a:lstStyle/>
-          <a:p>
-            <a:pPr algn="ctr" indent="0" marL="0">
-              <a:buNone/>
-            </a:pPr>
-            <a:r>
-              <a:rPr lang="en-US" sz="1400" b="1" dirty="0">
-                <a:solidFill>
-                  <a:schemeClr val="tx2"/>
-                </a:solidFill>
-              </a:rPr>
-              <a:t>1</a:t>
-            </a:r>
-            <a:endParaRPr lang="en-US" sz="1400" dirty="0"/>
-          </a:p>
-        </p:txBody>
-      </p:sp>
-      <p:sp>
-        <p:nvSpPr>
-          <p:cNvPr id="9" name="Text 6"/>
-          <p:cNvSpPr txBox="1"/>
-          <p:nvPr/>
-        </p:nvSpPr>
-        <p:spPr>
-          <a:xfrm>
-            <a:off x="1325880" y="3803904"/>
-            <a:ext cx="8229600" cy="493776"/>
-          </a:xfrm>
-          <a:prstGeom prst="rect">
-            <a:avLst/>
-          </a:prstGeom>
-          <a:noFill/>
-          <a:ln/>
-        </p:spPr>
-        <p:txBody>
-          <a:bodyPr wrap="square" lIns="0" tIns="0" rIns="0" bIns="0" rtlCol="0" anchor="ctr"/>
+            <a:off x="731520" y="4434840"/>
+            <a:ext cx="10515600" cy="822960"/>
+          </a:xfrm>
+          <a:prstGeom prst="rect">
+            <a:avLst/>
+          </a:prstGeom>
+          <a:noFill/>
+          <a:ln/>
+        </p:spPr>
+        <p:txBody>
+          <a:bodyPr wrap="square" lIns="0" tIns="0" rIns="0" bIns="0" rtlCol="0" anchor="t"/>
           <a:lstStyle/>
           <a:p>
             <a:pPr indent="0" marL="0">
@@ -3097,93 +3053,10 @@
                   <a:schemeClr val="bg1"/>
                 </a:solidFill>
               </a:rPr>
-              <a:t>Equipo Tech and Solve</a:t>
+              <a:t>Un equipo multidisciplinario dedicado al éxito de SURA,</a:t>
             </a:r>
             <a:endParaRPr lang="en-US" sz="2000" dirty="0"/>
           </a:p>
-        </p:txBody>
-      </p:sp>
-      <p:sp>
-        <p:nvSpPr>
-          <p:cNvPr id="10" name="Shape 7"/>
-          <p:cNvSpPr/>
-          <p:nvPr/>
-        </p:nvSpPr>
-        <p:spPr>
-          <a:xfrm>
-            <a:off x="731520" y="4434840"/>
-            <a:ext cx="420624" cy="420624"/>
-          </a:xfrm>
-          <a:prstGeom prst="ellipse">
-            <a:avLst/>
-          </a:prstGeom>
-          <a:solidFill>
-            <a:schemeClr val="bg1"/>
-          </a:solidFill>
-          <a:ln w="12700">
-            <a:solidFill>
-              <a:schemeClr val="bg1"/>
-            </a:solidFill>
-            <a:prstDash val="solid"/>
-          </a:ln>
-        </p:spPr>
-      </p:sp>
-      <p:sp>
-        <p:nvSpPr>
-          <p:cNvPr id="11" name="Text 8"/>
-          <p:cNvSpPr txBox="1"/>
-          <p:nvPr/>
-        </p:nvSpPr>
-        <p:spPr>
-          <a:xfrm>
-            <a:off x="731520" y="4434840"/>
-            <a:ext cx="420624" cy="420624"/>
-          </a:xfrm>
-          <a:prstGeom prst="rect">
-            <a:avLst/>
-          </a:prstGeom>
-          <a:noFill/>
-          <a:ln/>
-        </p:spPr>
-        <p:txBody>
-          <a:bodyPr wrap="square" lIns="0" tIns="0" rIns="0" bIns="0" rtlCol="0" anchor="ctr"/>
-          <a:lstStyle/>
-          <a:p>
-            <a:pPr algn="ctr" indent="0" marL="0">
-              <a:buNone/>
-            </a:pPr>
-            <a:r>
-              <a:rPr lang="en-US" sz="1400" b="1" dirty="0">
-                <a:solidFill>
-                  <a:schemeClr val="tx2"/>
-                </a:solidFill>
-              </a:rPr>
-              <a:t>2</a:t>
-            </a:r>
-            <a:endParaRPr lang="en-US" sz="1400" dirty="0"/>
-          </a:p>
-        </p:txBody>
-      </p:sp>
-      <p:sp>
-        <p:nvSpPr>
-          <p:cNvPr id="12" name="Text 9"/>
-          <p:cNvSpPr txBox="1"/>
-          <p:nvPr/>
-        </p:nvSpPr>
-        <p:spPr>
-          <a:xfrm>
-            <a:off x="1325880" y="4398264"/>
-            <a:ext cx="8229600" cy="493776"/>
-          </a:xfrm>
-          <a:prstGeom prst="rect">
-            <a:avLst/>
-          </a:prstGeom>
-          <a:noFill/>
-          <a:ln/>
-        </p:spPr>
-        <p:txBody>
-          <a:bodyPr wrap="square" lIns="0" tIns="0" rIns="0" bIns="0" rtlCol="0" anchor="ctr"/>
-          <a:lstStyle/>
           <a:p>
             <a:pPr indent="0" marL="0">
               <a:buNone/>
@@ -3194,7 +3067,7 @@
                   <a:schemeClr val="bg1"/>
                 </a:solidFill>
               </a:rPr>
-              <a:t>IA de Tech and Solve</a:t>
+              <a:t>con IA generativa propia que acelera resultados medibles</a:t>
             </a:r>
             <a:endParaRPr lang="en-US" sz="2000" dirty="0"/>
           </a:p>
@@ -3202,511 +3075,7 @@
       </p:sp>
       <p:sp>
         <p:nvSpPr>
-          <p:cNvPr id="13" name="Shape 10"/>
-          <p:cNvSpPr/>
-          <p:nvPr/>
-        </p:nvSpPr>
-        <p:spPr>
-          <a:xfrm>
-            <a:off x="7360920" y="502920"/>
-            <a:ext cx="4096512" cy="1115568"/>
-          </a:xfrm>
-          <a:prstGeom prst="roundRect">
-            <a:avLst>
-              <a:gd name="adj" fmla="val 9836"/>
-            </a:avLst>
-          </a:prstGeom>
-          <a:solidFill>
-            <a:srgbClr val="3A1878"/>
-          </a:solidFill>
-          <a:ln w="9525">
-            <a:solidFill>
-              <a:srgbClr val="5B3D96"/>
-            </a:solidFill>
-            <a:prstDash val="solid"/>
-          </a:ln>
-        </p:spPr>
-      </p:sp>
-      <p:sp>
-        <p:nvSpPr>
-          <p:cNvPr id="14" name="Shape 11"/>
-          <p:cNvSpPr/>
-          <p:nvPr/>
-        </p:nvSpPr>
-        <p:spPr>
-          <a:xfrm>
-            <a:off x="7525512" y="649224"/>
-            <a:ext cx="822960" cy="822960"/>
-          </a:xfrm>
-          <a:prstGeom prst="ellipse">
-            <a:avLst/>
-          </a:prstGeom>
-          <a:solidFill>
-            <a:schemeClr val="bg1"/>
-          </a:solidFill>
-          <a:ln w="12700">
-            <a:solidFill>
-              <a:schemeClr val="bg1"/>
-            </a:solidFill>
-            <a:prstDash val="solid"/>
-          </a:ln>
-        </p:spPr>
-      </p:sp>
-      <p:pic>
-        <p:nvPicPr>
-          <p:cNvPr id="15" name="Image 1" descr="Raúl A. De Villa C.">    </p:cNvPr>
-          <p:cNvPicPr>
-            <a:picLocks noChangeAspect="1"/>
-          </p:cNvPicPr>
-          <p:nvPr/>
-        </p:nvPicPr>
-        <p:blipFill>
-          <a:blip r:embed="rId2"/>
-          <a:stretch>
-            <a:fillRect/>
-          </a:stretch>
-        </p:blipFill>
-        <p:spPr>
-          <a:xfrm>
-            <a:off x="7552944" y="676656"/>
-            <a:ext cx="768096" cy="768096"/>
-          </a:xfrm>
-          <a:prstGeom prst="ellipse">
-            <a:avLst/>
-          </a:prstGeom>
-        </p:spPr>
-      </p:pic>
-      <p:sp>
-        <p:nvSpPr>
-          <p:cNvPr id="16" name="Text 12"/>
-          <p:cNvSpPr txBox="1"/>
-          <p:nvPr/>
-        </p:nvSpPr>
-        <p:spPr>
-          <a:xfrm>
-            <a:off x="8485632" y="557784"/>
-            <a:ext cx="2862072" cy="1005840"/>
-          </a:xfrm>
-          <a:prstGeom prst="rect">
-            <a:avLst/>
-          </a:prstGeom>
-          <a:noFill/>
-          <a:ln/>
-        </p:spPr>
-        <p:txBody>
-          <a:bodyPr wrap="square" lIns="0" tIns="0" rIns="0" bIns="0" rtlCol="0" anchor="ctr"/>
-          <a:lstStyle/>
-          <a:p>
-            <a:pPr indent="0" marL="0">
-              <a:buNone/>
-            </a:pPr>
-            <a:r>
-              <a:rPr lang="en-US" sz="1300" b="1" dirty="0">
-                <a:solidFill>
-                  <a:schemeClr val="bg1"/>
-                </a:solidFill>
-              </a:rPr>
-              <a:t>Raúl A. De Villa C.</a:t>
-            </a:r>
-            <a:endParaRPr lang="en-US" sz="1400" dirty="0"/>
-          </a:p>
-          <a:p>
-            <a:pPr indent="0" marL="0">
-              <a:buNone/>
-            </a:pPr>
-            <a:r>
-              <a:rPr lang="en-US" sz="1050" dirty="0">
-                <a:solidFill>
-                  <a:schemeClr val="bg2"/>
-                </a:solidFill>
-              </a:rPr>
-              <a:t>Co-Founder · Director de soluciones digitales para seguros</a:t>
-            </a:r>
-            <a:endParaRPr lang="en-US" sz="1400" dirty="0"/>
-          </a:p>
-        </p:txBody>
-      </p:sp>
-      <p:sp>
-        <p:nvSpPr>
-          <p:cNvPr id="17" name="Shape 13"/>
-          <p:cNvSpPr/>
-          <p:nvPr/>
-        </p:nvSpPr>
-        <p:spPr>
-          <a:xfrm>
-            <a:off x="7360920" y="1746504"/>
-            <a:ext cx="4096512" cy="1115568"/>
-          </a:xfrm>
-          <a:prstGeom prst="roundRect">
-            <a:avLst>
-              <a:gd name="adj" fmla="val 9836"/>
-            </a:avLst>
-          </a:prstGeom>
-          <a:solidFill>
-            <a:srgbClr val="3A1878"/>
-          </a:solidFill>
-          <a:ln w="9525">
-            <a:solidFill>
-              <a:srgbClr val="5B3D96"/>
-            </a:solidFill>
-            <a:prstDash val="solid"/>
-          </a:ln>
-        </p:spPr>
-      </p:sp>
-      <p:sp>
-        <p:nvSpPr>
-          <p:cNvPr id="18" name="Shape 14"/>
-          <p:cNvSpPr/>
-          <p:nvPr/>
-        </p:nvSpPr>
-        <p:spPr>
-          <a:xfrm>
-            <a:off x="7525512" y="1892808"/>
-            <a:ext cx="822960" cy="822960"/>
-          </a:xfrm>
-          <a:prstGeom prst="ellipse">
-            <a:avLst/>
-          </a:prstGeom>
-          <a:solidFill>
-            <a:schemeClr val="bg1"/>
-          </a:solidFill>
-          <a:ln w="12700">
-            <a:solidFill>
-              <a:schemeClr val="bg1"/>
-            </a:solidFill>
-            <a:prstDash val="solid"/>
-          </a:ln>
-        </p:spPr>
-      </p:sp>
-      <p:pic>
-        <p:nvPicPr>
-          <p:cNvPr id="19" name="Image 2" descr="Alexandra Acosta">    </p:cNvPr>
-          <p:cNvPicPr>
-            <a:picLocks noChangeAspect="1"/>
-          </p:cNvPicPr>
-          <p:nvPr/>
-        </p:nvPicPr>
-        <p:blipFill>
-          <a:blip r:embed="rId3"/>
-          <a:stretch>
-            <a:fillRect/>
-          </a:stretch>
-        </p:blipFill>
-        <p:spPr>
-          <a:xfrm>
-            <a:off x="7552944" y="1920240"/>
-            <a:ext cx="768096" cy="768096"/>
-          </a:xfrm>
-          <a:prstGeom prst="ellipse">
-            <a:avLst/>
-          </a:prstGeom>
-        </p:spPr>
-      </p:pic>
-      <p:sp>
-        <p:nvSpPr>
-          <p:cNvPr id="20" name="Text 15"/>
-          <p:cNvSpPr txBox="1"/>
-          <p:nvPr/>
-        </p:nvSpPr>
-        <p:spPr>
-          <a:xfrm>
-            <a:off x="8485632" y="1801368"/>
-            <a:ext cx="2862072" cy="1005840"/>
-          </a:xfrm>
-          <a:prstGeom prst="rect">
-            <a:avLst/>
-          </a:prstGeom>
-          <a:noFill/>
-          <a:ln/>
-        </p:spPr>
-        <p:txBody>
-          <a:bodyPr wrap="square" lIns="0" tIns="0" rIns="0" bIns="0" rtlCol="0" anchor="ctr"/>
-          <a:lstStyle/>
-          <a:p>
-            <a:pPr indent="0" marL="0">
-              <a:buNone/>
-            </a:pPr>
-            <a:r>
-              <a:rPr lang="en-US" sz="1300" b="1" dirty="0">
-                <a:solidFill>
-                  <a:schemeClr val="bg1"/>
-                </a:solidFill>
-              </a:rPr>
-              <a:t>Alexandra Acosta</a:t>
-            </a:r>
-            <a:endParaRPr lang="en-US" sz="1400" dirty="0"/>
-          </a:p>
-          <a:p>
-            <a:pPr indent="0" marL="0">
-              <a:buNone/>
-            </a:pPr>
-            <a:r>
-              <a:rPr lang="en-US" sz="1050" dirty="0">
-                <a:solidFill>
-                  <a:schemeClr val="bg2"/>
-                </a:solidFill>
-              </a:rPr>
-              <a:t>Gerente de Éxito del Cliente</a:t>
-            </a:r>
-            <a:endParaRPr lang="en-US" sz="1400" dirty="0"/>
-          </a:p>
-        </p:txBody>
-      </p:sp>
-      <p:sp>
-        <p:nvSpPr>
-          <p:cNvPr id="21" name="Shape 16"/>
-          <p:cNvSpPr/>
-          <p:nvPr/>
-        </p:nvSpPr>
-        <p:spPr>
-          <a:xfrm>
-            <a:off x="7360920" y="2990088"/>
-            <a:ext cx="4096512" cy="1115568"/>
-          </a:xfrm>
-          <a:prstGeom prst="roundRect">
-            <a:avLst>
-              <a:gd name="adj" fmla="val 9836"/>
-            </a:avLst>
-          </a:prstGeom>
-          <a:solidFill>
-            <a:srgbClr val="3A1878"/>
-          </a:solidFill>
-          <a:ln w="9525">
-            <a:solidFill>
-              <a:srgbClr val="5B3D96"/>
-            </a:solidFill>
-            <a:prstDash val="solid"/>
-          </a:ln>
-        </p:spPr>
-      </p:sp>
-      <p:sp>
-        <p:nvSpPr>
-          <p:cNvPr id="22" name="Shape 17"/>
-          <p:cNvSpPr/>
-          <p:nvPr/>
-        </p:nvSpPr>
-        <p:spPr>
-          <a:xfrm>
-            <a:off x="7525512" y="3136392"/>
-            <a:ext cx="822960" cy="822960"/>
-          </a:xfrm>
-          <a:prstGeom prst="ellipse">
-            <a:avLst/>
-          </a:prstGeom>
-          <a:solidFill>
-            <a:schemeClr val="bg1"/>
-          </a:solidFill>
-          <a:ln w="12700">
-            <a:solidFill>
-              <a:schemeClr val="bg1"/>
-            </a:solidFill>
-            <a:prstDash val="solid"/>
-          </a:ln>
-        </p:spPr>
-      </p:sp>
-      <p:pic>
-        <p:nvPicPr>
-          <p:cNvPr id="23" name="Image 3" descr="Jorge Andrés Gómez Velásquez">    </p:cNvPr>
-          <p:cNvPicPr>
-            <a:picLocks noChangeAspect="1"/>
-          </p:cNvPicPr>
-          <p:nvPr/>
-        </p:nvPicPr>
-        <p:blipFill>
-          <a:blip r:embed="rId4"/>
-          <a:stretch>
-            <a:fillRect/>
-          </a:stretch>
-        </p:blipFill>
-        <p:spPr>
-          <a:xfrm>
-            <a:off x="7552944" y="3163824"/>
-            <a:ext cx="768096" cy="768096"/>
-          </a:xfrm>
-          <a:prstGeom prst="ellipse">
-            <a:avLst/>
-          </a:prstGeom>
-        </p:spPr>
-      </p:pic>
-      <p:sp>
-        <p:nvSpPr>
-          <p:cNvPr id="24" name="Text 18"/>
-          <p:cNvSpPr txBox="1"/>
-          <p:nvPr/>
-        </p:nvSpPr>
-        <p:spPr>
-          <a:xfrm>
-            <a:off x="8485632" y="3044952"/>
-            <a:ext cx="2862072" cy="1005840"/>
-          </a:xfrm>
-          <a:prstGeom prst="rect">
-            <a:avLst/>
-          </a:prstGeom>
-          <a:noFill/>
-          <a:ln/>
-        </p:spPr>
-        <p:txBody>
-          <a:bodyPr wrap="square" lIns="0" tIns="0" rIns="0" bIns="0" rtlCol="0" anchor="ctr"/>
-          <a:lstStyle/>
-          <a:p>
-            <a:pPr indent="0" marL="0">
-              <a:buNone/>
-            </a:pPr>
-            <a:r>
-              <a:rPr lang="en-US" sz="1300" b="1" dirty="0">
-                <a:solidFill>
-                  <a:schemeClr val="bg1"/>
-                </a:solidFill>
-              </a:rPr>
-              <a:t>Jorge Andrés Gómez Velásquez</a:t>
-            </a:r>
-            <a:endParaRPr lang="en-US" sz="1400" dirty="0"/>
-          </a:p>
-          <a:p>
-            <a:pPr indent="0" marL="0">
-              <a:buNone/>
-            </a:pPr>
-            <a:r>
-              <a:rPr lang="en-US" sz="1050" dirty="0">
-                <a:solidFill>
-                  <a:schemeClr val="bg2"/>
-                </a:solidFill>
-              </a:rPr>
-              <a:t>Líder del Éxito del Cliente</a:t>
-            </a:r>
-            <a:endParaRPr lang="en-US" sz="1400" dirty="0"/>
-          </a:p>
-        </p:txBody>
-      </p:sp>
-      <p:sp>
-        <p:nvSpPr>
-          <p:cNvPr id="25" name="Shape 19"/>
-          <p:cNvSpPr/>
-          <p:nvPr/>
-        </p:nvSpPr>
-        <p:spPr>
-          <a:xfrm>
-            <a:off x="7360920" y="4233672"/>
-            <a:ext cx="4096512" cy="1115568"/>
-          </a:xfrm>
-          <a:prstGeom prst="roundRect">
-            <a:avLst>
-              <a:gd name="adj" fmla="val 9836"/>
-            </a:avLst>
-          </a:prstGeom>
-          <a:solidFill>
-            <a:srgbClr val="3A1878"/>
-          </a:solidFill>
-          <a:ln w="9525">
-            <a:solidFill>
-              <a:srgbClr val="5B3D96"/>
-            </a:solidFill>
-            <a:prstDash val="solid"/>
-          </a:ln>
-        </p:spPr>
-      </p:sp>
-      <p:sp>
-        <p:nvSpPr>
-          <p:cNvPr id="26" name="Shape 20"/>
-          <p:cNvSpPr/>
-          <p:nvPr/>
-        </p:nvSpPr>
-        <p:spPr>
-          <a:xfrm>
-            <a:off x="7525512" y="4379976"/>
-            <a:ext cx="822960" cy="822960"/>
-          </a:xfrm>
-          <a:prstGeom prst="ellipse">
-            <a:avLst/>
-          </a:prstGeom>
-          <a:solidFill>
-            <a:schemeClr val="bg1"/>
-          </a:solidFill>
-          <a:ln w="12700">
-            <a:solidFill>
-              <a:schemeClr val="bg1"/>
-            </a:solidFill>
-            <a:prstDash val="solid"/>
-          </a:ln>
-        </p:spPr>
-      </p:sp>
-      <p:pic>
-        <p:nvPicPr>
-          <p:cNvPr id="27" name="Image 4" descr="Didier Fabián Franco Gómez">    </p:cNvPr>
-          <p:cNvPicPr>
-            <a:picLocks noChangeAspect="1"/>
-          </p:cNvPicPr>
-          <p:nvPr/>
-        </p:nvPicPr>
-        <p:blipFill>
-          <a:blip r:embed="rId5"/>
-          <a:stretch>
-            <a:fillRect/>
-          </a:stretch>
-        </p:blipFill>
-        <p:spPr>
-          <a:xfrm>
-            <a:off x="7552944" y="4407408"/>
-            <a:ext cx="768096" cy="768096"/>
-          </a:xfrm>
-          <a:prstGeom prst="ellipse">
-            <a:avLst/>
-          </a:prstGeom>
-        </p:spPr>
-      </p:pic>
-      <p:sp>
-        <p:nvSpPr>
-          <p:cNvPr id="28" name="Text 21"/>
-          <p:cNvSpPr txBox="1"/>
-          <p:nvPr/>
-        </p:nvSpPr>
-        <p:spPr>
-          <a:xfrm>
-            <a:off x="8485632" y="4288536"/>
-            <a:ext cx="2862072" cy="1005840"/>
-          </a:xfrm>
-          <a:prstGeom prst="rect">
-            <a:avLst/>
-          </a:prstGeom>
-          <a:noFill/>
-          <a:ln/>
-        </p:spPr>
-        <p:txBody>
-          <a:bodyPr wrap="square" lIns="0" tIns="0" rIns="0" bIns="0" rtlCol="0" anchor="ctr"/>
-          <a:lstStyle/>
-          <a:p>
-            <a:pPr indent="0" marL="0">
-              <a:buNone/>
-            </a:pPr>
-            <a:r>
-              <a:rPr lang="en-US" sz="1300" b="1" dirty="0">
-                <a:solidFill>
-                  <a:schemeClr val="bg1"/>
-                </a:solidFill>
-              </a:rPr>
-              <a:t>Didier Fabián Franco Gómez</a:t>
-            </a:r>
-            <a:endParaRPr lang="en-US" sz="1400" dirty="0"/>
-          </a:p>
-          <a:p>
-            <a:pPr indent="0" marL="0">
-              <a:buNone/>
-            </a:pPr>
-            <a:r>
-              <a:rPr lang="en-US" sz="1050" dirty="0">
-                <a:solidFill>
-                  <a:schemeClr val="bg2"/>
-                </a:solidFill>
-              </a:rPr>
-              <a:t>Líder de Comunidad · Arquitecto de la propuesta</a:t>
-            </a:r>
-            <a:endParaRPr lang="en-US" sz="1400" dirty="0"/>
-          </a:p>
-        </p:txBody>
-      </p:sp>
-      <p:sp>
-        <p:nvSpPr>
-          <p:cNvPr id="29" name="Shape 22"/>
+          <p:cNvPr id="8" name="Shape 5"/>
           <p:cNvSpPr/>
           <p:nvPr/>
         </p:nvSpPr>
@@ -3731,7 +3100,7 @@
       </p:sp>
       <p:sp>
         <p:nvSpPr>
-          <p:cNvPr id="30" name="Text 23"/>
+          <p:cNvPr id="9" name="Text 6"/>
           <p:cNvSpPr txBox="1"/>
           <p:nvPr/>
         </p:nvSpPr>
@@ -3781,7 +3150,7 @@
       </p:sp>
       <p:sp>
         <p:nvSpPr>
-          <p:cNvPr id="31" name="Text 24"/>
+          <p:cNvPr id="10" name="Text 7"/>
           <p:cNvSpPr txBox="1"/>
           <p:nvPr/>
         </p:nvSpPr>
@@ -5098,11 +4467,11 @@
         <p:spPr>
           <a:xfrm>
             <a:off x="548640" y="4206240"/>
-            <a:ext cx="2651760" cy="1600200"/>
+            <a:ext cx="2651760" cy="1389888"/>
           </a:xfrm>
           <a:prstGeom prst="roundRect">
             <a:avLst>
-              <a:gd name="adj" fmla="val 4571"/>
+              <a:gd name="adj" fmla="val 5263"/>
             </a:avLst>
           </a:prstGeom>
           <a:solidFill>
@@ -5160,8 +4529,8 @@
         </p:nvSpPr>
         <p:spPr>
           <a:xfrm>
-            <a:off x="731520" y="4681728"/>
-            <a:ext cx="2286000" cy="1097280"/>
+            <a:off x="731520" y="4663440"/>
+            <a:ext cx="2286000" cy="914400"/>
           </a:xfrm>
           <a:prstGeom prst="rect">
             <a:avLst/>
@@ -5197,11 +4566,11 @@
         <p:spPr>
           <a:xfrm>
             <a:off x="3353105" y="4206240"/>
-            <a:ext cx="2651760" cy="1600200"/>
+            <a:ext cx="2651760" cy="1389888"/>
           </a:xfrm>
           <a:prstGeom prst="roundRect">
             <a:avLst>
-              <a:gd name="adj" fmla="val 4571"/>
+              <a:gd name="adj" fmla="val 5263"/>
             </a:avLst>
           </a:prstGeom>
           <a:solidFill>
@@ -5259,8 +4628,8 @@
         </p:nvSpPr>
         <p:spPr>
           <a:xfrm>
-            <a:off x="3535985" y="4681728"/>
-            <a:ext cx="2286000" cy="1097280"/>
+            <a:off x="3535985" y="4663440"/>
+            <a:ext cx="2286000" cy="914400"/>
           </a:xfrm>
           <a:prstGeom prst="rect">
             <a:avLst/>
@@ -5296,11 +4665,11 @@
         <p:spPr>
           <a:xfrm>
             <a:off x="6157570" y="4206240"/>
-            <a:ext cx="2651760" cy="1600200"/>
+            <a:ext cx="2651760" cy="1389888"/>
           </a:xfrm>
           <a:prstGeom prst="roundRect">
             <a:avLst>
-              <a:gd name="adj" fmla="val 4571"/>
+              <a:gd name="adj" fmla="val 5263"/>
             </a:avLst>
           </a:prstGeom>
           <a:solidFill>
@@ -5358,8 +4727,8 @@
         </p:nvSpPr>
         <p:spPr>
           <a:xfrm>
-            <a:off x="6340450" y="4681728"/>
-            <a:ext cx="2286000" cy="1097280"/>
+            <a:off x="6340450" y="4663440"/>
+            <a:ext cx="2286000" cy="914400"/>
           </a:xfrm>
           <a:prstGeom prst="rect">
             <a:avLst/>
@@ -5395,11 +4764,11 @@
         <p:spPr>
           <a:xfrm>
             <a:off x="8962034" y="4206240"/>
-            <a:ext cx="2651760" cy="1600200"/>
+            <a:ext cx="2651760" cy="1389888"/>
           </a:xfrm>
           <a:prstGeom prst="roundRect">
             <a:avLst>
-              <a:gd name="adj" fmla="val 4571"/>
+              <a:gd name="adj" fmla="val 5263"/>
             </a:avLst>
           </a:prstGeom>
           <a:solidFill>
@@ -5457,8 +4826,8 @@
         </p:nvSpPr>
         <p:spPr>
           <a:xfrm>
-            <a:off x="9144914" y="4681728"/>
-            <a:ext cx="2286000" cy="1097280"/>
+            <a:off x="9144914" y="4663440"/>
+            <a:ext cx="2286000" cy="914400"/>
           </a:xfrm>
           <a:prstGeom prst="rect">
             <a:avLst/>
@@ -12254,74 +11623,11 @@
         <p:spPr>
           <a:xfrm>
             <a:off x="8046720" y="1600200"/>
-            <a:ext cx="3593592" cy="1097280"/>
+            <a:ext cx="3593592" cy="1325880"/>
           </a:xfrm>
           <a:prstGeom prst="roundRect">
             <a:avLst>
-              <a:gd name="adj" fmla="val 6667"/>
-            </a:avLst>
-          </a:prstGeom>
-          <a:solidFill>
-            <a:schemeClr val="bg2"/>
-          </a:solidFill>
-          <a:ln w="12700">
-            <a:solidFill>
-              <a:schemeClr val="bg2"/>
-            </a:solidFill>
-            <a:prstDash val="solid"/>
-          </a:ln>
-        </p:spPr>
-      </p:sp>
-      <p:sp>
-        <p:nvSpPr>
-          <p:cNvPr id="26" name="Text 23"/>
-          <p:cNvSpPr txBox="1"/>
-          <p:nvPr/>
-        </p:nvSpPr>
-        <p:spPr>
-          <a:xfrm>
-            <a:off x="8275320" y="1600200"/>
-            <a:ext cx="3136392" cy="1097280"/>
-          </a:xfrm>
-          <a:prstGeom prst="rect">
-            <a:avLst/>
-          </a:prstGeom>
-          <a:noFill/>
-          <a:ln/>
-        </p:spPr>
-        <p:txBody>
-          <a:bodyPr wrap="square" lIns="0" tIns="0" rIns="0" bIns="0" rtlCol="0" anchor="ctr"/>
-          <a:lstStyle/>
-          <a:p>
-            <a:pPr indent="0" marL="0">
-              <a:buNone/>
-            </a:pPr>
-            <a:r>
-              <a:rPr lang="en-US" sz="1500" b="1" dirty="0">
-                <a:solidFill>
-                  <a:schemeClr val="tx2"/>
-                </a:solidFill>
-              </a:rPr>
-              <a:t>El modelo lo pone el proveedor. Lo que hace que funcione bien es nuestro.</a:t>
-            </a:r>
-            <a:endParaRPr lang="en-US" sz="1500" dirty="0"/>
-          </a:p>
-        </p:txBody>
-      </p:sp>
-      <p:sp>
-        <p:nvSpPr>
-          <p:cNvPr id="27" name="Shape 24"/>
-          <p:cNvSpPr/>
-          <p:nvPr/>
-        </p:nvSpPr>
-        <p:spPr>
-          <a:xfrm>
-            <a:off x="8046720" y="2834640"/>
-            <a:ext cx="3593592" cy="914400"/>
-          </a:xfrm>
-          <a:prstGeom prst="roundRect">
-            <a:avLst>
-              <a:gd name="adj" fmla="val 8000"/>
+              <a:gd name="adj" fmla="val 5517"/>
             </a:avLst>
           </a:prstGeom>
           <a:solidFill>
@@ -12337,14 +11643,14 @@
       </p:sp>
       <p:sp>
         <p:nvSpPr>
-          <p:cNvPr id="28" name="Text 25"/>
+          <p:cNvPr id="26" name="Text 23"/>
           <p:cNvSpPr txBox="1"/>
           <p:nvPr/>
         </p:nvSpPr>
         <p:spPr>
           <a:xfrm>
-            <a:off x="8229600" y="2880360"/>
-            <a:ext cx="3227832" cy="822960"/>
+            <a:off x="8229600" y="1645920"/>
+            <a:ext cx="3227832" cy="1234440"/>
           </a:xfrm>
           <a:prstGeom prst="rect">
             <a:avLst/>
@@ -12360,45 +11666,45 @@
               <a:buNone/>
             </a:pPr>
             <a:r>
-              <a:rPr lang="en-US" sz="1200" b="1" dirty="0">
+              <a:rPr lang="en-US" sz="1300" b="1" dirty="0">
                 <a:solidFill>
                   <a:schemeClr val="tx2"/>
                 </a:solidFill>
               </a:rPr>
               <a:t>Ya opera en proyectos de clientes</a:t>
             </a:r>
-            <a:endParaRPr lang="en-US" sz="1200" dirty="0"/>
-          </a:p>
-          <a:p>
-            <a:pPr indent="0" marL="0">
-              <a:buNone/>
-            </a:pPr>
-            <a:r>
-              <a:rPr lang="en-US" sz="1200" dirty="0">
+            <a:endParaRPr lang="en-US" sz="1300" dirty="0"/>
+          </a:p>
+          <a:p>
+            <a:pPr indent="0" marL="0">
+              <a:buNone/>
+            </a:pPr>
+            <a:r>
+              <a:rPr lang="en-US" sz="1300" dirty="0">
                 <a:solidFill>
                   <a:schemeClr val="accent6"/>
                 </a:solidFill>
               </a:rPr>
               <a:t>No es un piloto: es como trabajamos hoy.</a:t>
             </a:r>
-            <a:endParaRPr lang="en-US" sz="1200" dirty="0"/>
-          </a:p>
-        </p:txBody>
-      </p:sp>
-      <p:sp>
-        <p:nvSpPr>
-          <p:cNvPr id="29" name="Shape 26"/>
+            <a:endParaRPr lang="en-US" sz="1300" dirty="0"/>
+          </a:p>
+        </p:txBody>
+      </p:sp>
+      <p:sp>
+        <p:nvSpPr>
+          <p:cNvPr id="27" name="Shape 24"/>
           <p:cNvSpPr/>
           <p:nvPr/>
         </p:nvSpPr>
         <p:spPr>
           <a:xfrm>
-            <a:off x="8046720" y="3867912"/>
-            <a:ext cx="3593592" cy="914400"/>
+            <a:off x="8046720" y="3086100"/>
+            <a:ext cx="3593592" cy="1325880"/>
           </a:xfrm>
           <a:prstGeom prst="roundRect">
             <a:avLst>
-              <a:gd name="adj" fmla="val 8000"/>
+              <a:gd name="adj" fmla="val 5517"/>
             </a:avLst>
           </a:prstGeom>
           <a:solidFill>
@@ -12414,14 +11720,14 @@
       </p:sp>
       <p:sp>
         <p:nvSpPr>
-          <p:cNvPr id="30" name="Text 27"/>
+          <p:cNvPr id="28" name="Text 25"/>
           <p:cNvSpPr txBox="1"/>
           <p:nvPr/>
         </p:nvSpPr>
         <p:spPr>
           <a:xfrm>
-            <a:off x="8229600" y="3913632"/>
-            <a:ext cx="3227832" cy="822960"/>
+            <a:off x="8229600" y="3131820"/>
+            <a:ext cx="3227832" cy="1234440"/>
           </a:xfrm>
           <a:prstGeom prst="rect">
             <a:avLst/>
@@ -12437,45 +11743,45 @@
               <a:buNone/>
             </a:pPr>
             <a:r>
-              <a:rPr lang="en-US" sz="1200" b="1" dirty="0">
+              <a:rPr lang="en-US" sz="1300" b="1" dirty="0">
                 <a:solidFill>
                   <a:schemeClr val="tx2"/>
                 </a:solidFill>
               </a:rPr>
               <a:t>Madurez medida</a:t>
             </a:r>
-            <a:endParaRPr lang="en-US" sz="1200" dirty="0"/>
-          </a:p>
-          <a:p>
-            <a:pPr indent="0" marL="0">
-              <a:buNone/>
-            </a:pPr>
-            <a:r>
-              <a:rPr lang="en-US" sz="1200" dirty="0">
+            <a:endParaRPr lang="en-US" sz="1300" dirty="0"/>
+          </a:p>
+          <a:p>
+            <a:pPr indent="0" marL="0">
+              <a:buNone/>
+            </a:pPr>
+            <a:r>
+              <a:rPr lang="en-US" sz="1300" dirty="0">
                 <a:solidFill>
                   <a:schemeClr val="accent6"/>
                 </a:solidFill>
               </a:rPr>
               <a:t>Medimos su madurez con métricas de equipo y la mejoramos con evidencia.</a:t>
             </a:r>
-            <a:endParaRPr lang="en-US" sz="1200" dirty="0"/>
-          </a:p>
-        </p:txBody>
-      </p:sp>
-      <p:sp>
-        <p:nvSpPr>
-          <p:cNvPr id="31" name="Shape 28"/>
+            <a:endParaRPr lang="en-US" sz="1300" dirty="0"/>
+          </a:p>
+        </p:txBody>
+      </p:sp>
+      <p:sp>
+        <p:nvSpPr>
+          <p:cNvPr id="29" name="Shape 26"/>
           <p:cNvSpPr/>
           <p:nvPr/>
         </p:nvSpPr>
         <p:spPr>
           <a:xfrm>
-            <a:off x="8046720" y="4901184"/>
-            <a:ext cx="3593592" cy="914400"/>
+            <a:off x="8046720" y="4572000"/>
+            <a:ext cx="3593592" cy="1325880"/>
           </a:xfrm>
           <a:prstGeom prst="roundRect">
             <a:avLst>
-              <a:gd name="adj" fmla="val 8000"/>
+              <a:gd name="adj" fmla="val 5517"/>
             </a:avLst>
           </a:prstGeom>
           <a:solidFill>
@@ -12491,14 +11797,14 @@
       </p:sp>
       <p:sp>
         <p:nvSpPr>
-          <p:cNvPr id="32" name="Text 29"/>
+          <p:cNvPr id="30" name="Text 27"/>
           <p:cNvSpPr txBox="1"/>
           <p:nvPr/>
         </p:nvSpPr>
         <p:spPr>
           <a:xfrm>
-            <a:off x="8229600" y="4946904"/>
-            <a:ext cx="3227832" cy="822960"/>
+            <a:off x="8229600" y="4617720"/>
+            <a:ext cx="3227832" cy="1234440"/>
           </a:xfrm>
           <a:prstGeom prst="rect">
             <a:avLst/>
@@ -12514,28 +11820,28 @@
               <a:buNone/>
             </a:pPr>
             <a:r>
-              <a:rPr lang="en-US" sz="1200" b="1" dirty="0">
+              <a:rPr lang="en-US" sz="1300" b="1" dirty="0">
                 <a:solidFill>
                   <a:schemeClr val="tx2"/>
                 </a:solidFill>
               </a:rPr>
               <a:t>Uso responsable</a:t>
             </a:r>
-            <a:endParaRPr lang="en-US" sz="1200" dirty="0"/>
-          </a:p>
-          <a:p>
-            <a:pPr indent="0" marL="0">
-              <a:buNone/>
-            </a:pPr>
-            <a:r>
-              <a:rPr lang="en-US" sz="1200" dirty="0">
+            <a:endParaRPr lang="en-US" sz="1300" dirty="0"/>
+          </a:p>
+          <a:p>
+            <a:pPr indent="0" marL="0">
+              <a:buNone/>
+            </a:pPr>
+            <a:r>
+              <a:rPr lang="en-US" sz="1300" dirty="0">
                 <a:solidFill>
                   <a:schemeClr val="accent6"/>
                 </a:solidFill>
               </a:rPr>
               <a:t>Cada desarrollador se forma en buenos principios y en proteger los datos del cliente.</a:t>
             </a:r>
-            <a:endParaRPr lang="en-US" sz="1200" dirty="0"/>
+            <a:endParaRPr lang="en-US" sz="1300" dirty="0"/>
           </a:p>
         </p:txBody>
       </p:sp>
@@ -17262,7 +16568,7 @@
 </file>
 
 <file path=ppt/slides/slide2.xml><?xml version="1.0" encoding="utf-8"?>
-<p:sld xmlns:a="http://schemas.openxmlformats.org/drawingml/2006/main" xmlns:r="http://schemas.openxmlformats.org/officeDocument/2006/relationships" xmlns:p="http://schemas.openxmlformats.org/presentationml/2006/main">
+<p:sld xmlns:a="http://schemas.openxmlformats.org/drawingml/2006/main" xmlns:r="http://schemas.openxmlformats.org/officeDocument/2006/relationships" xmlns:p="http://schemas.openxmlformats.org/presentationml/2006/main" show="0">
   <p:cSld name="Slide 2">
     <p:spTree>
       <p:nvGrpSpPr>
@@ -17374,8 +16680,8 @@
         </p:nvSpPr>
         <p:spPr>
           <a:xfrm>
-            <a:off x="731520" y="3840480"/>
-            <a:ext cx="6583680" cy="1371600"/>
+            <a:off x="731520" y="3017520"/>
+            <a:ext cx="6766560" cy="777240"/>
           </a:xfrm>
           <a:prstGeom prst="rect">
             <a:avLst/>
@@ -17391,14 +16697,14 @@
               <a:buNone/>
             </a:pPr>
             <a:r>
-              <a:rPr lang="en-US" sz="1900" dirty="0">
-                <a:solidFill>
-                  <a:schemeClr val="accent6"/>
-                </a:solidFill>
-              </a:rPr>
-              <a:t>Dos desarrolladores construyen los sistemas agénticos del MVP de gestores, con un arquitecto que define el cómo y lo revisa, por sprints y potenciados por la IA generativa propia de Tech and Solve.</a:t>
-            </a:r>
-            <a:endParaRPr lang="en-US" sz="1900" dirty="0"/>
+              <a:rPr lang="en-US" sz="1700" b="1" dirty="0">
+                <a:solidFill>
+                  <a:schemeClr val="tx2"/>
+                </a:solidFill>
+              </a:rPr>
+              <a:t>Un equipo ágil y experto que potencia el MVP con IA generativa para garantizar resultados medibles:</a:t>
+            </a:r>
+            <a:endParaRPr lang="en-US" sz="1700" dirty="0"/>
           </a:p>
         </p:txBody>
       </p:sp>
@@ -17410,6 +16716,42 @@
         </p:nvSpPr>
         <p:spPr>
           <a:xfrm>
+            <a:off x="731520" y="3840480"/>
+            <a:ext cx="6766560" cy="1783080"/>
+          </a:xfrm>
+          <a:prstGeom prst="rect">
+            <a:avLst/>
+          </a:prstGeom>
+          <a:noFill/>
+          <a:ln/>
+        </p:spPr>
+        <p:txBody>
+          <a:bodyPr wrap="square" lIns="0" tIns="0" rIns="0" bIns="0" rtlCol="0" anchor="t"/>
+          <a:lstStyle/>
+          <a:p>
+            <a:pPr indent="0" marL="0">
+              <a:buNone/>
+            </a:pPr>
+            <a:r>
+              <a:rPr lang="en-US" sz="1600" dirty="0">
+                <a:solidFill>
+                  <a:schemeClr val="accent6"/>
+                </a:solidFill>
+              </a:rPr>
+              <a:t>Dos desarrolladores construyen los sistemas agénticos del MVP de gestores, con un arquitecto que define el cómo y lo revisa, por sprints y potenciados por la IA generativa propia de Tech and Solve, y con el respaldo de un equipo directivo que apoya de forma transversal el éxito de la implementación.</a:t>
+            </a:r>
+            <a:endParaRPr lang="en-US" sz="1600" dirty="0"/>
+          </a:p>
+        </p:txBody>
+      </p:sp>
+      <p:sp>
+        <p:nvSpPr>
+          <p:cNvPr id="7" name="Text 4"/>
+          <p:cNvSpPr txBox="1"/>
+          <p:nvPr/>
+        </p:nvSpPr>
+        <p:spPr>
+          <a:xfrm>
             <a:off x="731520" y="5760720"/>
             <a:ext cx="6766560" cy="640080"/>
           </a:xfrm>
@@ -17454,7 +16796,7 @@
       </p:sp>
       <p:sp>
         <p:nvSpPr>
-          <p:cNvPr id="7" name="Shape 4"/>
+          <p:cNvPr id="8" name="Shape 5"/>
           <p:cNvSpPr/>
           <p:nvPr/>
         </p:nvSpPr>
@@ -17481,7 +16823,7 @@
       </p:sp>
       <p:sp>
         <p:nvSpPr>
-          <p:cNvPr id="8" name="Shape 5"/>
+          <p:cNvPr id="9" name="Shape 6"/>
           <p:cNvSpPr/>
           <p:nvPr/>
         </p:nvSpPr>
@@ -17506,7 +16848,7 @@
       </p:sp>
       <p:pic>
         <p:nvPicPr>
-          <p:cNvPr id="9" name="Image 1" descr="Raúl A. De Villa C.">    </p:cNvPr>
+          <p:cNvPr id="10" name="Image 1" descr="Raúl A. De Villa C.">    </p:cNvPr>
           <p:cNvPicPr>
             <a:picLocks noChangeAspect="1"/>
           </p:cNvPicPr>
@@ -17530,7 +16872,7 @@
       </p:pic>
       <p:sp>
         <p:nvSpPr>
-          <p:cNvPr id="10" name="Text 6"/>
+          <p:cNvPr id="11" name="Text 7"/>
           <p:cNvSpPr txBox="1"/>
           <p:nvPr/>
         </p:nvSpPr>
@@ -17580,7 +16922,7 @@
       </p:sp>
       <p:sp>
         <p:nvSpPr>
-          <p:cNvPr id="11" name="Shape 7"/>
+          <p:cNvPr id="12" name="Shape 8"/>
           <p:cNvSpPr/>
           <p:nvPr/>
         </p:nvSpPr>
@@ -17607,7 +16949,7 @@
       </p:sp>
       <p:sp>
         <p:nvSpPr>
-          <p:cNvPr id="12" name="Shape 8"/>
+          <p:cNvPr id="13" name="Shape 9"/>
           <p:cNvSpPr/>
           <p:nvPr/>
         </p:nvSpPr>
@@ -17632,7 +16974,7 @@
       </p:sp>
       <p:pic>
         <p:nvPicPr>
-          <p:cNvPr id="13" name="Image 2" descr="Alexandra Acosta">    </p:cNvPr>
+          <p:cNvPr id="14" name="Image 2" descr="Alexandra Acosta">    </p:cNvPr>
           <p:cNvPicPr>
             <a:picLocks noChangeAspect="1"/>
           </p:cNvPicPr>
@@ -17656,7 +16998,7 @@
       </p:pic>
       <p:sp>
         <p:nvSpPr>
-          <p:cNvPr id="14" name="Text 9"/>
+          <p:cNvPr id="15" name="Text 10"/>
           <p:cNvSpPr txBox="1"/>
           <p:nvPr/>
         </p:nvSpPr>
@@ -17706,7 +17048,7 @@
       </p:sp>
       <p:sp>
         <p:nvSpPr>
-          <p:cNvPr id="15" name="Shape 10"/>
+          <p:cNvPr id="16" name="Shape 11"/>
           <p:cNvSpPr/>
           <p:nvPr/>
         </p:nvSpPr>
@@ -17733,7 +17075,7 @@
       </p:sp>
       <p:sp>
         <p:nvSpPr>
-          <p:cNvPr id="16" name="Shape 11"/>
+          <p:cNvPr id="17" name="Shape 12"/>
           <p:cNvSpPr/>
           <p:nvPr/>
         </p:nvSpPr>
@@ -17758,7 +17100,7 @@
       </p:sp>
       <p:pic>
         <p:nvPicPr>
-          <p:cNvPr id="17" name="Image 3" descr="Jorge Andrés Gómez Velásquez">    </p:cNvPr>
+          <p:cNvPr id="18" name="Image 3" descr="Jorge Andrés Gómez Velásquez">    </p:cNvPr>
           <p:cNvPicPr>
             <a:picLocks noChangeAspect="1"/>
           </p:cNvPicPr>
@@ -17782,7 +17124,7 @@
       </p:pic>
       <p:sp>
         <p:nvSpPr>
-          <p:cNvPr id="18" name="Text 12"/>
+          <p:cNvPr id="19" name="Text 13"/>
           <p:cNvSpPr txBox="1"/>
           <p:nvPr/>
         </p:nvSpPr>
@@ -17832,7 +17174,7 @@
       </p:sp>
       <p:sp>
         <p:nvSpPr>
-          <p:cNvPr id="19" name="Shape 13"/>
+          <p:cNvPr id="20" name="Shape 14"/>
           <p:cNvSpPr/>
           <p:nvPr/>
         </p:nvSpPr>
@@ -17859,7 +17201,7 @@
       </p:sp>
       <p:sp>
         <p:nvSpPr>
-          <p:cNvPr id="20" name="Shape 14"/>
+          <p:cNvPr id="21" name="Shape 15"/>
           <p:cNvSpPr/>
           <p:nvPr/>
         </p:nvSpPr>
@@ -17884,7 +17226,7 @@
       </p:sp>
       <p:pic>
         <p:nvPicPr>
-          <p:cNvPr id="21" name="Image 4" descr="Didier Fabián Franco Gómez">    </p:cNvPr>
+          <p:cNvPr id="22" name="Image 4" descr="Didier Fabián Franco Gómez">    </p:cNvPr>
           <p:cNvPicPr>
             <a:picLocks noChangeAspect="1"/>
           </p:cNvPicPr>
@@ -17908,7 +17250,7 @@
       </p:pic>
       <p:sp>
         <p:nvSpPr>
-          <p:cNvPr id="22" name="Text 15"/>
+          <p:cNvPr id="23" name="Text 16"/>
           <p:cNvSpPr txBox="1"/>
           <p:nvPr/>
         </p:nvSpPr>
@@ -17950,7 +17292,7 @@
                   <a:schemeClr val="bg2"/>
                 </a:solidFill>
               </a:rPr>
-              <a:t>Arquitecto · parcial. Marca el rumbo técnico con el equipo, lo alinea con la arquitectura de SURA y asegura que cada historia lo cumpla.</a:t>
+              <a:t>Arquitecto Líder. Marca el rumbo técnico con el equipo, lo alinea con la arquitectura de SURA y asegura que cada historia lo cumpla.</a:t>
             </a:r>
             <a:endParaRPr lang="en-US" sz="1400" dirty="0"/>
           </a:p>
@@ -17958,7 +17300,7 @@
       </p:sp>
       <p:sp>
         <p:nvSpPr>
-          <p:cNvPr id="23" name="Shape 16"/>
+          <p:cNvPr id="24" name="Shape 17"/>
           <p:cNvSpPr/>
           <p:nvPr/>
         </p:nvSpPr>
@@ -17985,7 +17327,7 @@
       </p:sp>
       <p:sp>
         <p:nvSpPr>
-          <p:cNvPr id="24" name="Shape 17"/>
+          <p:cNvPr id="25" name="Shape 18"/>
           <p:cNvSpPr/>
           <p:nvPr/>
         </p:nvSpPr>
@@ -18008,45 +17350,33 @@
           </a:ln>
         </p:spPr>
       </p:sp>
-      <p:sp>
-        <p:nvSpPr>
-          <p:cNvPr id="25" name="Text 18"/>
-          <p:cNvSpPr txBox="1"/>
-          <p:nvPr/>
-        </p:nvSpPr>
-        <p:spPr>
-          <a:xfrm>
-            <a:off x="8348472" y="4599432"/>
-            <a:ext cx="566928" cy="566928"/>
-          </a:xfrm>
-          <a:prstGeom prst="rect">
-            <a:avLst/>
-          </a:prstGeom>
-          <a:noFill/>
-          <a:ln/>
-        </p:spPr>
-        <p:txBody>
-          <a:bodyPr wrap="square" lIns="0" tIns="0" rIns="0" bIns="0" rtlCol="0" anchor="ctr"/>
-          <a:lstStyle/>
-          <a:p>
-            <a:pPr algn="ctr" indent="0" marL="0">
-              <a:buNone/>
-            </a:pPr>
-            <a:r>
-              <a:rPr lang="en-US" sz="1600" b="1" dirty="0">
-                <a:solidFill>
-                  <a:schemeClr val="tx2"/>
-                </a:solidFill>
-              </a:rPr>
-              <a:t>A</a:t>
-            </a:r>
-            <a:endParaRPr lang="en-US" sz="1600" dirty="0"/>
-          </a:p>
-        </p:txBody>
-      </p:sp>
-      <p:sp>
-        <p:nvSpPr>
-          <p:cNvPr id="26" name="Text 19"/>
+      <p:pic>
+        <p:nvPicPr>
+          <p:cNvPr id="26" name="Image 5" descr="Juan Gabriel Colorado">    </p:cNvPr>
+          <p:cNvPicPr>
+            <a:picLocks noChangeAspect="1"/>
+          </p:cNvPicPr>
+          <p:nvPr/>
+        </p:nvPicPr>
+        <p:blipFill>
+          <a:blip r:embed="rId6"/>
+          <a:stretch>
+            <a:fillRect/>
+          </a:stretch>
+        </p:blipFill>
+        <p:spPr>
+          <a:xfrm>
+            <a:off x="8375904" y="4626864"/>
+            <a:ext cx="512064" cy="512064"/>
+          </a:xfrm>
+          <a:prstGeom prst="ellipse">
+            <a:avLst/>
+          </a:prstGeom>
+        </p:spPr>
+      </p:pic>
+      <p:sp>
+        <p:nvSpPr>
+          <p:cNvPr id="27" name="Text 19"/>
           <p:cNvSpPr txBox="1"/>
           <p:nvPr/>
         </p:nvSpPr>
@@ -18074,7 +17404,7 @@
                   <a:schemeClr val="bg1"/>
                 </a:solidFill>
               </a:rPr>
-              <a:t>Desarrollador A</a:t>
+              <a:t>Juan Gabriel Colorado</a:t>
             </a:r>
             <a:endParaRPr lang="en-US" sz="1400" dirty="0"/>
           </a:p>
@@ -18088,7 +17418,7 @@
                   <a:schemeClr val="bg2"/>
                 </a:solidFill>
               </a:rPr>
-              <a:t>Construye los sistemas agénticos desde un backlog compartido</a:t>
+              <a:t>Desarrollador IA · Construye los sistemas agénticos desde un backlog compartido</a:t>
             </a:r>
             <a:endParaRPr lang="en-US" sz="1400" dirty="0"/>
           </a:p>
@@ -18096,7 +17426,7 @@
       </p:sp>
       <p:sp>
         <p:nvSpPr>
-          <p:cNvPr id="27" name="Shape 20"/>
+          <p:cNvPr id="28" name="Shape 20"/>
           <p:cNvSpPr/>
           <p:nvPr/>
         </p:nvSpPr>
@@ -18123,7 +17453,7 @@
       </p:sp>
       <p:sp>
         <p:nvSpPr>
-          <p:cNvPr id="28" name="Shape 21"/>
+          <p:cNvPr id="29" name="Shape 21"/>
           <p:cNvSpPr/>
           <p:nvPr/>
         </p:nvSpPr>
@@ -18146,45 +17476,33 @@
           </a:ln>
         </p:spPr>
       </p:sp>
-      <p:sp>
-        <p:nvSpPr>
-          <p:cNvPr id="29" name="Text 22"/>
-          <p:cNvSpPr txBox="1"/>
-          <p:nvPr/>
-        </p:nvSpPr>
-        <p:spPr>
-          <a:xfrm>
-            <a:off x="8348472" y="5404104"/>
-            <a:ext cx="566928" cy="566928"/>
-          </a:xfrm>
-          <a:prstGeom prst="rect">
-            <a:avLst/>
-          </a:prstGeom>
-          <a:noFill/>
-          <a:ln/>
-        </p:spPr>
-        <p:txBody>
-          <a:bodyPr wrap="square" lIns="0" tIns="0" rIns="0" bIns="0" rtlCol="0" anchor="ctr"/>
-          <a:lstStyle/>
-          <a:p>
-            <a:pPr algn="ctr" indent="0" marL="0">
-              <a:buNone/>
-            </a:pPr>
-            <a:r>
-              <a:rPr lang="en-US" sz="1600" b="1" dirty="0">
-                <a:solidFill>
-                  <a:schemeClr val="tx2"/>
-                </a:solidFill>
-              </a:rPr>
-              <a:t>B</a:t>
-            </a:r>
-            <a:endParaRPr lang="en-US" sz="1600" dirty="0"/>
-          </a:p>
-        </p:txBody>
-      </p:sp>
-      <p:sp>
-        <p:nvSpPr>
-          <p:cNvPr id="30" name="Text 23"/>
+      <p:pic>
+        <p:nvPicPr>
+          <p:cNvPr id="30" name="Image 6" descr="Gian Valdiris">    </p:cNvPr>
+          <p:cNvPicPr>
+            <a:picLocks noChangeAspect="1"/>
+          </p:cNvPicPr>
+          <p:nvPr/>
+        </p:nvPicPr>
+        <p:blipFill>
+          <a:blip r:embed="rId7"/>
+          <a:stretch>
+            <a:fillRect/>
+          </a:stretch>
+        </p:blipFill>
+        <p:spPr>
+          <a:xfrm>
+            <a:off x="8375904" y="5431536"/>
+            <a:ext cx="512064" cy="512064"/>
+          </a:xfrm>
+          <a:prstGeom prst="ellipse">
+            <a:avLst/>
+          </a:prstGeom>
+        </p:spPr>
+      </p:pic>
+      <p:sp>
+        <p:nvSpPr>
+          <p:cNvPr id="31" name="Text 22"/>
           <p:cNvSpPr txBox="1"/>
           <p:nvPr/>
         </p:nvSpPr>
@@ -18212,7 +17530,7 @@
                   <a:schemeClr val="bg1"/>
                 </a:solidFill>
               </a:rPr>
-              <a:t>Desarrollador B</a:t>
+              <a:t>Gian Valdiris</a:t>
             </a:r>
             <a:endParaRPr lang="en-US" sz="1400" dirty="0"/>
           </a:p>
@@ -18226,7 +17544,7 @@
                   <a:schemeClr val="bg2"/>
                 </a:solidFill>
               </a:rPr>
-              <a:t>Construye los sistemas agénticos desde un backlog compartido</a:t>
+              <a:t>Desarrollador IA · Construye los sistemas agénticos desde un backlog compartido</a:t>
             </a:r>
             <a:endParaRPr lang="en-US" sz="1400" dirty="0"/>
           </a:p>
@@ -18289,7 +17607,7 @@
                   <a:schemeClr val="tx2"/>
                 </a:solidFill>
               </a:rPr>
-              <a:t>Por qué el equipo de Tech and Solve es la mejor opción</a:t>
+              <a:t>Tech and Solve: más que tecnología, resultados sostenibles para SURA</a:t>
             </a:r>
             <a:endParaRPr lang="en-US" sz="2800" dirty="0"/>
           </a:p>
@@ -18330,8 +17648,8 @@
         </p:nvSpPr>
         <p:spPr>
           <a:xfrm>
-            <a:off x="822960" y="2011680"/>
-            <a:ext cx="2834640" cy="1828800"/>
+            <a:off x="822960" y="1828800"/>
+            <a:ext cx="2834640" cy="2103120"/>
           </a:xfrm>
           <a:prstGeom prst="rect">
             <a:avLst/>
@@ -18347,7 +17665,7 @@
               <a:buNone/>
             </a:pPr>
             <a:r>
-              <a:rPr lang="en-US" sz="2200" b="1" dirty="0">
+              <a:rPr lang="en-US" sz="1700" b="1" dirty="0">
                 <a:solidFill>
                   <a:schemeClr val="bg1"/>
                 </a:solidFill>
@@ -18355,9 +17673,9 @@
                 <a:ea typeface="+mj-lt" pitchFamily="34" charset="-122"/>
                 <a:cs typeface="+mj-lt" pitchFamily="34" charset="-120"/>
               </a:rPr>
-              <a:t>Expertos en construir sistemas agénticos, y en construirlos con IA.</a:t>
-            </a:r>
-            <a:endParaRPr lang="en-US" sz="2200" dirty="0"/>
+              <a:t>Un equipo que combina visión de negocio, excelencia técnica e IA generativa propia para acelerar resultados medibles y sostenibles.</a:t>
+            </a:r>
+            <a:endParaRPr lang="en-US" sz="1700" dirty="0"/>
           </a:p>
         </p:txBody>
       </p:sp>
@@ -18369,8 +17687,8 @@
         </p:nvSpPr>
         <p:spPr>
           <a:xfrm>
-            <a:off x="822960" y="3931920"/>
-            <a:ext cx="2834640" cy="1737360"/>
+            <a:off x="822960" y="4023360"/>
+            <a:ext cx="2834640" cy="1645920"/>
           </a:xfrm>
           <a:prstGeom prst="rect">
             <a:avLst/>
@@ -18515,7 +17833,7 @@
                   <a:schemeClr val="tx2"/>
                 </a:solidFill>
               </a:rPr>
-              <a:t>Expertos en sistemas agénticos</a:t>
+              <a:t>Capacidades distintivas</a:t>
             </a:r>
             <a:endParaRPr lang="en-US" sz="1400" dirty="0"/>
           </a:p>
@@ -18551,7 +17869,7 @@
                   <a:schemeClr val="tx1"/>
                 </a:solidFill>
               </a:rPr>
-              <a:t>Ya trabajamos con SURA en la arquitectura de gestores, la torre de control y la acertividad de los agentes.</a:t>
+              <a:t>Expertos en sistemas agénticos y arquitectura de gestores.</a:t>
             </a:r>
             <a:endParaRPr lang="en-US" sz="1200" dirty="0"/>
           </a:p>
@@ -18675,7 +17993,7 @@
                   <a:schemeClr val="tx2"/>
                 </a:solidFill>
               </a:rPr>
-              <a:t>IA propia de Tech and Solve</a:t>
+              <a:t>IA: procesos medibles</a:t>
             </a:r>
             <a:endParaRPr lang="en-US" sz="1400" dirty="0"/>
           </a:p>
@@ -18711,7 +18029,7 @@
                   <a:schemeClr val="tx1"/>
                 </a:solidFill>
               </a:rPr>
-              <a:t>Conocimiento, proceso y controles propios, de uso exclusivo de nuestro equipo tech.</a:t>
+              <a:t>IA propia que acelera cada sprint con validación humana.</a:t>
             </a:r>
             <a:endParaRPr lang="en-US" sz="1200" dirty="0"/>
           </a:p>
@@ -18835,7 +18153,7 @@
                   <a:schemeClr val="tx2"/>
                 </a:solidFill>
               </a:rPr>
-              <a:t>Más rápido, sin perder control</a:t>
+              <a:t>Equipo: estructura flexible</a:t>
             </a:r>
             <a:endParaRPr lang="en-US" sz="1400" dirty="0"/>
           </a:p>
@@ -18871,7 +18189,7 @@
                   <a:schemeClr val="tx1"/>
                 </a:solidFill>
               </a:rPr>
-              <a:t>Nuestra IA potencia cada etapa del proceso y una persona valida cada paso.</a:t>
+              <a:t>Equipo ágil con arquitecto y desarrolladores dedicados.</a:t>
             </a:r>
             <a:endParaRPr lang="en-US" sz="1200" dirty="0"/>
           </a:p>
@@ -18995,7 +18313,7 @@
                   <a:schemeClr val="tx2"/>
                 </a:solidFill>
               </a:rPr>
-              <a:t>Garantías que se verifican</a:t>
+              <a:t>Talento consultivo</a:t>
             </a:r>
             <a:endParaRPr lang="en-US" sz="1400" dirty="0"/>
           </a:p>
@@ -19031,7 +18349,7 @@
                   <a:schemeClr val="tx1"/>
                 </a:solidFill>
               </a:rPr>
-              <a:t>Calidad, performance y seguridad que ya operan, llevadas a los agentes de SURA.</a:t>
+              <a:t>Experiencia previa con SURA, mirada crítica de negocio y acompañamiento cercano.</a:t>
             </a:r>
             <a:endParaRPr lang="en-US" sz="1200" dirty="0"/>
           </a:p>
@@ -19046,7 +18364,7 @@
         <p:spPr>
           <a:xfrm>
             <a:off x="4114800" y="4572000"/>
-            <a:ext cx="3657600" cy="1325880"/>
+            <a:ext cx="7498080" cy="1325880"/>
           </a:xfrm>
           <a:prstGeom prst="roundRect">
             <a:avLst>
@@ -19134,7 +18452,7 @@
         <p:spPr>
           <a:xfrm>
             <a:off x="4800600" y="4709160"/>
-            <a:ext cx="2834640" cy="438912"/>
+            <a:ext cx="6675120" cy="438912"/>
           </a:xfrm>
           <a:prstGeom prst="rect">
             <a:avLst/>
@@ -19155,7 +18473,7 @@
                   <a:schemeClr val="tx2"/>
                 </a:solidFill>
               </a:rPr>
-              <a:t>Equipo enfocado y con dirección</a:t>
+              <a:t>Medición integral</a:t>
             </a:r>
             <a:endParaRPr lang="en-US" sz="1400" dirty="0"/>
           </a:p>
@@ -19170,7 +18488,7 @@
         <p:spPr>
           <a:xfrm>
             <a:off x="4297680" y="5212080"/>
-            <a:ext cx="3291840" cy="640080"/>
+            <a:ext cx="7132320" cy="640080"/>
           </a:xfrm>
           <a:prstGeom prst="rect">
             <a:avLst/>
@@ -19191,167 +18509,7 @@
                   <a:schemeClr val="tx1"/>
                 </a:solidFill>
               </a:rPr>
-              <a:t>Un arquitecto que define, se alinea con el equipo de arquitectura de SURA y revisa, y dos desarrolladores que implementan.</a:t>
-            </a:r>
-            <a:endParaRPr lang="en-US" sz="1200" dirty="0"/>
-          </a:p>
-        </p:txBody>
-      </p:sp>
-      <p:sp>
-        <p:nvSpPr>
-          <p:cNvPr id="32" name="Shape 29"/>
-          <p:cNvSpPr/>
-          <p:nvPr/>
-        </p:nvSpPr>
-        <p:spPr>
-          <a:xfrm>
-            <a:off x="7955280" y="4572000"/>
-            <a:ext cx="3657600" cy="1325880"/>
-          </a:xfrm>
-          <a:prstGeom prst="roundRect">
-            <a:avLst>
-              <a:gd name="adj" fmla="val 5517"/>
-            </a:avLst>
-          </a:prstGeom>
-          <a:solidFill>
-            <a:schemeClr val="accent4"/>
-          </a:solidFill>
-          <a:ln w="12700">
-            <a:solidFill>
-              <a:srgbClr val="DCD8EC"/>
-            </a:solidFill>
-            <a:prstDash val="solid"/>
-          </a:ln>
-        </p:spPr>
-      </p:sp>
-      <p:sp>
-        <p:nvSpPr>
-          <p:cNvPr id="33" name="Shape 30"/>
-          <p:cNvSpPr/>
-          <p:nvPr/>
-        </p:nvSpPr>
-        <p:spPr>
-          <a:xfrm>
-            <a:off x="8138160" y="4736592"/>
-            <a:ext cx="384048" cy="384048"/>
-          </a:xfrm>
-          <a:prstGeom prst="ellipse">
-            <a:avLst/>
-          </a:prstGeom>
-          <a:solidFill>
-            <a:schemeClr val="accent1"/>
-          </a:solidFill>
-          <a:ln w="12700">
-            <a:solidFill>
-              <a:schemeClr val="accent1"/>
-            </a:solidFill>
-            <a:prstDash val="solid"/>
-          </a:ln>
-        </p:spPr>
-      </p:sp>
-      <p:sp>
-        <p:nvSpPr>
-          <p:cNvPr id="34" name="Text 31"/>
-          <p:cNvSpPr txBox="1"/>
-          <p:nvPr/>
-        </p:nvSpPr>
-        <p:spPr>
-          <a:xfrm>
-            <a:off x="8138160" y="4736592"/>
-            <a:ext cx="384048" cy="384048"/>
-          </a:xfrm>
-          <a:prstGeom prst="rect">
-            <a:avLst/>
-          </a:prstGeom>
-          <a:noFill/>
-          <a:ln/>
-        </p:spPr>
-        <p:txBody>
-          <a:bodyPr wrap="square" lIns="0" tIns="0" rIns="0" bIns="0" rtlCol="0" anchor="ctr"/>
-          <a:lstStyle/>
-          <a:p>
-            <a:pPr algn="ctr" indent="0" marL="0">
-              <a:buNone/>
-            </a:pPr>
-            <a:r>
-              <a:rPr lang="en-US" sz="1200" b="1" dirty="0">
-                <a:solidFill>
-                  <a:schemeClr val="bg1"/>
-                </a:solidFill>
-              </a:rPr>
-              <a:t>6</a:t>
-            </a:r>
-            <a:endParaRPr lang="en-US" sz="1200" dirty="0"/>
-          </a:p>
-        </p:txBody>
-      </p:sp>
-      <p:sp>
-        <p:nvSpPr>
-          <p:cNvPr id="35" name="Text 32"/>
-          <p:cNvSpPr txBox="1"/>
-          <p:nvPr/>
-        </p:nvSpPr>
-        <p:spPr>
-          <a:xfrm>
-            <a:off x="8641080" y="4709160"/>
-            <a:ext cx="2834640" cy="438912"/>
-          </a:xfrm>
-          <a:prstGeom prst="rect">
-            <a:avLst/>
-          </a:prstGeom>
-          <a:noFill/>
-          <a:ln/>
-        </p:spPr>
-        <p:txBody>
-          <a:bodyPr wrap="square" lIns="0" tIns="0" rIns="0" bIns="0" rtlCol="0" anchor="ctr"/>
-          <a:lstStyle/>
-          <a:p>
-            <a:pPr indent="0" marL="0">
-              <a:buNone/>
-            </a:pPr>
-            <a:r>
-              <a:rPr lang="en-US" sz="1400" b="1" dirty="0">
-                <a:solidFill>
-                  <a:schemeClr val="tx2"/>
-                </a:solidFill>
-              </a:rPr>
-              <a:t>Sobre el diseño de SURA</a:t>
-            </a:r>
-            <a:endParaRPr lang="en-US" sz="1400" dirty="0"/>
-          </a:p>
-        </p:txBody>
-      </p:sp>
-      <p:sp>
-        <p:nvSpPr>
-          <p:cNvPr id="36" name="Text 33"/>
-          <p:cNvSpPr txBox="1"/>
-          <p:nvPr/>
-        </p:nvSpPr>
-        <p:spPr>
-          <a:xfrm>
-            <a:off x="8138160" y="5212080"/>
-            <a:ext cx="3291840" cy="640080"/>
-          </a:xfrm>
-          <a:prstGeom prst="rect">
-            <a:avLst/>
-          </a:prstGeom>
-          <a:noFill/>
-          <a:ln/>
-        </p:spPr>
-        <p:txBody>
-          <a:bodyPr wrap="square" lIns="0" tIns="0" rIns="0" bIns="0" rtlCol="0" anchor="t"/>
-          <a:lstStyle/>
-          <a:p>
-            <a:pPr indent="0" marL="0">
-              <a:buNone/>
-            </a:pPr>
-            <a:r>
-              <a:rPr lang="en-US" sz="1200" dirty="0">
-                <a:solidFill>
-                  <a:schemeClr val="tx1"/>
-                </a:solidFill>
-              </a:rPr>
-              <a:t>SURA define las historias, prioriza y ve funcionando lo construido en cada demo.</a:t>
+              <a:t>Garantías verificables en calidad, performance y seguridad.</a:t>
             </a:r>
             <a:endParaRPr lang="en-US" sz="1200" dirty="0"/>
           </a:p>
@@ -19522,7 +18680,7 @@
                   <a:schemeClr val="tx2"/>
                 </a:solidFill>
               </a:rPr>
-              <a:t>LIDERAZGO QUE ACOMPAÑA · DEDICACIÓN PUNTUAL</a:t>
+              <a:t>LIDERAZGO QUE ACOMPAÑA</a:t>
             </a:r>
             <a:endParaRPr lang="en-US" sz="950" dirty="0"/>
           </a:p>
@@ -20050,7 +19208,7 @@
                   <a:schemeClr val="accent2"/>
                 </a:solidFill>
               </a:rPr>
-              <a:t>  · Arquitecto, parcial</a:t>
+              <a:t>  · Arquitecto Líder</a:t>
             </a:r>
             <a:endParaRPr lang="en-US" sz="1400" dirty="0"/>
           </a:p>
@@ -20121,177 +19279,67 @@
       </p:sp>
       <p:sp>
         <p:nvSpPr>
-          <p:cNvPr id="24" name="Shape 17"/>
+          <p:cNvPr id="24" name="Text 17"/>
+          <p:cNvSpPr txBox="1"/>
+          <p:nvPr/>
+        </p:nvSpPr>
+        <p:spPr>
+          <a:xfrm>
+            <a:off x="749808" y="4023360"/>
+            <a:ext cx="1828800" cy="502920"/>
+          </a:xfrm>
+          <a:prstGeom prst="rect">
+            <a:avLst/>
+          </a:prstGeom>
+          <a:noFill/>
+          <a:ln/>
+        </p:spPr>
+        <p:txBody>
+          <a:bodyPr wrap="square" lIns="0" tIns="0" rIns="0" bIns="0" rtlCol="0" anchor="ctr"/>
+          <a:lstStyle/>
+          <a:p>
+            <a:pPr indent="0" marL="0">
+              <a:buNone/>
+            </a:pPr>
+            <a:r>
+              <a:rPr lang="en-US" sz="1500" b="1" dirty="0">
+                <a:solidFill>
+                  <a:schemeClr val="tx2"/>
+                </a:solidFill>
+              </a:rPr>
+              <a:t>Desarrolladores</a:t>
+            </a:r>
+            <a:endParaRPr lang="en-US" sz="1400" dirty="0"/>
+          </a:p>
+          <a:p>
+            <a:pPr indent="0" marL="0">
+              <a:buNone/>
+            </a:pPr>
+            <a:r>
+              <a:rPr lang="en-US" sz="900" b="1" dirty="0">
+                <a:solidFill>
+                  <a:schemeClr val="accent2"/>
+                </a:solidFill>
+              </a:rPr>
+              <a:t>Dedicación completa</a:t>
+            </a:r>
+            <a:endParaRPr lang="en-US" sz="1400" dirty="0"/>
+          </a:p>
+        </p:txBody>
+      </p:sp>
+      <p:sp>
+        <p:nvSpPr>
+          <p:cNvPr id="25" name="Shape 18"/>
           <p:cNvSpPr/>
           <p:nvPr/>
         </p:nvSpPr>
         <p:spPr>
           <a:xfrm>
-            <a:off x="749808" y="4059936"/>
-            <a:ext cx="384048" cy="384048"/>
+            <a:off x="2788920" y="4032504"/>
+            <a:ext cx="457200" cy="457200"/>
           </a:xfrm>
           <a:prstGeom prst="ellipse">
             <a:avLst/>
-          </a:prstGeom>
-          <a:solidFill>
-            <a:schemeClr val="accent1"/>
-          </a:solidFill>
-          <a:ln w="12700">
-            <a:solidFill>
-              <a:schemeClr val="accent1"/>
-            </a:solidFill>
-            <a:prstDash val="solid"/>
-          </a:ln>
-        </p:spPr>
-      </p:sp>
-      <p:sp>
-        <p:nvSpPr>
-          <p:cNvPr id="25" name="Text 18"/>
-          <p:cNvSpPr txBox="1"/>
-          <p:nvPr/>
-        </p:nvSpPr>
-        <p:spPr>
-          <a:xfrm>
-            <a:off x="749808" y="4059936"/>
-            <a:ext cx="384048" cy="384048"/>
-          </a:xfrm>
-          <a:prstGeom prst="rect">
-            <a:avLst/>
-          </a:prstGeom>
-          <a:noFill/>
-          <a:ln/>
-        </p:spPr>
-        <p:txBody>
-          <a:bodyPr wrap="square" lIns="0" tIns="0" rIns="0" bIns="0" rtlCol="0" anchor="ctr"/>
-          <a:lstStyle/>
-          <a:p>
-            <a:pPr algn="ctr" indent="0" marL="0">
-              <a:buNone/>
-            </a:pPr>
-            <a:r>
-              <a:rPr lang="en-US" sz="1200" b="1" dirty="0">
-                <a:solidFill>
-                  <a:schemeClr val="bg1"/>
-                </a:solidFill>
-              </a:rPr>
-              <a:t>A</a:t>
-            </a:r>
-            <a:endParaRPr lang="en-US" sz="1200" dirty="0"/>
-          </a:p>
-        </p:txBody>
-      </p:sp>
-      <p:sp>
-        <p:nvSpPr>
-          <p:cNvPr id="26" name="Shape 19"/>
-          <p:cNvSpPr/>
-          <p:nvPr/>
-        </p:nvSpPr>
-        <p:spPr>
-          <a:xfrm>
-            <a:off x="1207008" y="4059936"/>
-            <a:ext cx="384048" cy="384048"/>
-          </a:xfrm>
-          <a:prstGeom prst="ellipse">
-            <a:avLst/>
-          </a:prstGeom>
-          <a:solidFill>
-            <a:schemeClr val="accent1"/>
-          </a:solidFill>
-          <a:ln w="12700">
-            <a:solidFill>
-              <a:schemeClr val="accent1"/>
-            </a:solidFill>
-            <a:prstDash val="solid"/>
-          </a:ln>
-        </p:spPr>
-      </p:sp>
-      <p:sp>
-        <p:nvSpPr>
-          <p:cNvPr id="27" name="Text 20"/>
-          <p:cNvSpPr txBox="1"/>
-          <p:nvPr/>
-        </p:nvSpPr>
-        <p:spPr>
-          <a:xfrm>
-            <a:off x="1207008" y="4059936"/>
-            <a:ext cx="384048" cy="384048"/>
-          </a:xfrm>
-          <a:prstGeom prst="rect">
-            <a:avLst/>
-          </a:prstGeom>
-          <a:noFill/>
-          <a:ln/>
-        </p:spPr>
-        <p:txBody>
-          <a:bodyPr wrap="square" lIns="0" tIns="0" rIns="0" bIns="0" rtlCol="0" anchor="ctr"/>
-          <a:lstStyle/>
-          <a:p>
-            <a:pPr algn="ctr" indent="0" marL="0">
-              <a:buNone/>
-            </a:pPr>
-            <a:r>
-              <a:rPr lang="en-US" sz="1200" b="1" dirty="0">
-                <a:solidFill>
-                  <a:schemeClr val="bg1"/>
-                </a:solidFill>
-              </a:rPr>
-              <a:t>B</a:t>
-            </a:r>
-            <a:endParaRPr lang="en-US" sz="1200" dirty="0"/>
-          </a:p>
-        </p:txBody>
-      </p:sp>
-      <p:sp>
-        <p:nvSpPr>
-          <p:cNvPr id="28" name="Text 21"/>
-          <p:cNvSpPr txBox="1"/>
-          <p:nvPr/>
-        </p:nvSpPr>
-        <p:spPr>
-          <a:xfrm>
-            <a:off x="1737360" y="4059936"/>
-            <a:ext cx="4572000" cy="384048"/>
-          </a:xfrm>
-          <a:prstGeom prst="rect">
-            <a:avLst/>
-          </a:prstGeom>
-          <a:noFill/>
-          <a:ln/>
-        </p:spPr>
-        <p:txBody>
-          <a:bodyPr wrap="square" lIns="0" tIns="0" rIns="0" bIns="0" rtlCol="0" anchor="ctr"/>
-          <a:lstStyle/>
-          <a:p>
-            <a:pPr indent="0" marL="0">
-              <a:buNone/>
-            </a:pPr>
-            <a:r>
-              <a:rPr lang="en-US" sz="1500" b="1" dirty="0">
-                <a:solidFill>
-                  <a:schemeClr val="tx2"/>
-                </a:solidFill>
-              </a:rPr>
-              <a:t>Desarrolladores · dedicación completa</a:t>
-            </a:r>
-            <a:endParaRPr lang="en-US" sz="1500" dirty="0"/>
-          </a:p>
-        </p:txBody>
-      </p:sp>
-      <p:sp>
-        <p:nvSpPr>
-          <p:cNvPr id="29" name="Shape 22"/>
-          <p:cNvSpPr/>
-          <p:nvPr/>
-        </p:nvSpPr>
-        <p:spPr>
-          <a:xfrm>
-            <a:off x="749808" y="4544568"/>
-            <a:ext cx="2200656" cy="896112"/>
-          </a:xfrm>
-          <a:prstGeom prst="roundRect">
-            <a:avLst>
-              <a:gd name="adj" fmla="val 8163"/>
-            </a:avLst>
           </a:prstGeom>
           <a:solidFill>
             <a:schemeClr val="bg1"/>
@@ -20304,71 +19352,93 @@
           </a:ln>
         </p:spPr>
       </p:sp>
-      <p:sp>
-        <p:nvSpPr>
-          <p:cNvPr id="30" name="Text 23"/>
+      <p:pic>
+        <p:nvPicPr>
+          <p:cNvPr id="26" name="Image 4" descr="preencoded.png">    </p:cNvPr>
+          <p:cNvPicPr>
+            <a:picLocks noChangeAspect="1"/>
+          </p:cNvPicPr>
+          <p:nvPr/>
+        </p:nvPicPr>
+        <p:blipFill>
+          <a:blip r:embed="rId5"/>
+          <a:stretch>
+            <a:fillRect/>
+          </a:stretch>
+        </p:blipFill>
+        <p:spPr>
+          <a:xfrm>
+            <a:off x="2816352" y="4059936"/>
+            <a:ext cx="402336" cy="402336"/>
+          </a:xfrm>
+          <a:prstGeom prst="ellipse">
+            <a:avLst/>
+          </a:prstGeom>
+        </p:spPr>
+      </p:pic>
+      <p:sp>
+        <p:nvSpPr>
+          <p:cNvPr id="27" name="Text 19"/>
           <p:cNvSpPr txBox="1"/>
           <p:nvPr/>
         </p:nvSpPr>
         <p:spPr>
           <a:xfrm>
-            <a:off x="859536" y="4590288"/>
-            <a:ext cx="1981200" cy="822960"/>
-          </a:xfrm>
-          <a:prstGeom prst="rect">
-            <a:avLst/>
-          </a:prstGeom>
-          <a:noFill/>
-          <a:ln/>
-        </p:spPr>
-        <p:txBody>
-          <a:bodyPr wrap="square" lIns="0" tIns="0" rIns="0" bIns="0" rtlCol="0" anchor="t"/>
-          <a:lstStyle/>
-          <a:p>
-            <a:pPr indent="0" marL="0">
-              <a:buNone/>
-            </a:pPr>
-            <a:r>
-              <a:rPr lang="en-US" sz="1050" b="1" dirty="0">
-                <a:solidFill>
-                  <a:schemeClr val="accent1"/>
-                </a:solidFill>
-              </a:rPr>
-              <a:t>1 · Refinan</a:t>
-            </a:r>
-            <a:endParaRPr lang="en-US" sz="1050" dirty="0"/>
-          </a:p>
-          <a:p>
-            <a:pPr indent="0" marL="0">
-              <a:buNone/>
-            </a:pPr>
-            <a:r>
-              <a:rPr lang="en-US" sz="1050" dirty="0">
-                <a:solidFill>
-                  <a:schemeClr val="tx1"/>
-                </a:solidFill>
-              </a:rPr>
-              <a:t>Bajan cada historia a diseño técnico con el arquetipo, junto al arquitecto.</a:t>
-            </a:r>
-            <a:endParaRPr lang="en-US" sz="1050" dirty="0"/>
-          </a:p>
-        </p:txBody>
-      </p:sp>
-      <p:sp>
-        <p:nvSpPr>
-          <p:cNvPr id="31" name="Shape 24"/>
+            <a:off x="3319272" y="4005072"/>
+            <a:ext cx="1828800" cy="512064"/>
+          </a:xfrm>
+          <a:prstGeom prst="rect">
+            <a:avLst/>
+          </a:prstGeom>
+          <a:noFill/>
+          <a:ln/>
+        </p:spPr>
+        <p:txBody>
+          <a:bodyPr wrap="square" lIns="0" tIns="0" rIns="0" bIns="0" rtlCol="0" anchor="ctr"/>
+          <a:lstStyle/>
+          <a:p>
+            <a:pPr indent="0" marL="0">
+              <a:buNone/>
+            </a:pPr>
+            <a:r>
+              <a:rPr lang="en-US" sz="1000" b="1" dirty="0">
+                <a:solidFill>
+                  <a:schemeClr val="tx2"/>
+                </a:solidFill>
+              </a:rPr>
+              <a:t>Juan Gabriel Colorado</a:t>
+            </a:r>
+            <a:endParaRPr lang="en-US" sz="1400" dirty="0"/>
+          </a:p>
+          <a:p>
+            <a:pPr indent="0" marL="0">
+              <a:buNone/>
+            </a:pPr>
+            <a:r>
+              <a:rPr lang="en-US" sz="850" b="1" dirty="0">
+                <a:solidFill>
+                  <a:schemeClr val="accent2"/>
+                </a:solidFill>
+              </a:rPr>
+              <a:t>Desarrollador IA</a:t>
+            </a:r>
+            <a:endParaRPr lang="en-US" sz="1400" dirty="0"/>
+          </a:p>
+        </p:txBody>
+      </p:sp>
+      <p:sp>
+        <p:nvSpPr>
+          <p:cNvPr id="28" name="Shape 20"/>
           <p:cNvSpPr/>
           <p:nvPr/>
         </p:nvSpPr>
         <p:spPr>
           <a:xfrm>
-            <a:off x="3060192" y="4544568"/>
-            <a:ext cx="2200656" cy="896112"/>
-          </a:xfrm>
-          <a:prstGeom prst="roundRect">
-            <a:avLst>
-              <a:gd name="adj" fmla="val 8163"/>
-            </a:avLst>
+            <a:off x="5212080" y="4032504"/>
+            <a:ext cx="457200" cy="457200"/>
+          </a:xfrm>
+          <a:prstGeom prst="ellipse">
+            <a:avLst/>
           </a:prstGeom>
           <a:solidFill>
             <a:schemeClr val="bg1"/>
@@ -20381,65 +19451,89 @@
           </a:ln>
         </p:spPr>
       </p:sp>
-      <p:sp>
-        <p:nvSpPr>
-          <p:cNvPr id="32" name="Text 25"/>
+      <p:pic>
+        <p:nvPicPr>
+          <p:cNvPr id="29" name="Image 5" descr="preencoded.png">    </p:cNvPr>
+          <p:cNvPicPr>
+            <a:picLocks noChangeAspect="1"/>
+          </p:cNvPicPr>
+          <p:nvPr/>
+        </p:nvPicPr>
+        <p:blipFill>
+          <a:blip r:embed="rId6"/>
+          <a:stretch>
+            <a:fillRect/>
+          </a:stretch>
+        </p:blipFill>
+        <p:spPr>
+          <a:xfrm>
+            <a:off x="5239512" y="4059936"/>
+            <a:ext cx="402336" cy="402336"/>
+          </a:xfrm>
+          <a:prstGeom prst="ellipse">
+            <a:avLst/>
+          </a:prstGeom>
+        </p:spPr>
+      </p:pic>
+      <p:sp>
+        <p:nvSpPr>
+          <p:cNvPr id="30" name="Text 21"/>
           <p:cNvSpPr txBox="1"/>
           <p:nvPr/>
         </p:nvSpPr>
         <p:spPr>
           <a:xfrm>
-            <a:off x="3169920" y="4590288"/>
-            <a:ext cx="1981200" cy="822960"/>
-          </a:xfrm>
-          <a:prstGeom prst="rect">
-            <a:avLst/>
-          </a:prstGeom>
-          <a:noFill/>
-          <a:ln/>
-        </p:spPr>
-        <p:txBody>
-          <a:bodyPr wrap="square" lIns="0" tIns="0" rIns="0" bIns="0" rtlCol="0" anchor="t"/>
-          <a:lstStyle/>
-          <a:p>
-            <a:pPr indent="0" marL="0">
-              <a:buNone/>
-            </a:pPr>
-            <a:r>
-              <a:rPr lang="en-US" sz="1050" b="1" dirty="0">
-                <a:solidFill>
-                  <a:schemeClr val="accent1"/>
-                </a:solidFill>
-              </a:rPr>
-              <a:t>2 · Estiman</a:t>
-            </a:r>
-            <a:endParaRPr lang="en-US" sz="1050" dirty="0"/>
-          </a:p>
-          <a:p>
-            <a:pPr indent="0" marL="0">
-              <a:buNone/>
-            </a:pPr>
-            <a:r>
-              <a:rPr lang="en-US" sz="1050" dirty="0">
-                <a:solidFill>
-                  <a:schemeClr val="tx1"/>
-                </a:solidFill>
-              </a:rPr>
-              <a:t>Ponen los puntos de cada historia y la parten si pasa de 13.</a:t>
-            </a:r>
-            <a:endParaRPr lang="en-US" sz="1050" dirty="0"/>
-          </a:p>
-        </p:txBody>
-      </p:sp>
-      <p:sp>
-        <p:nvSpPr>
-          <p:cNvPr id="33" name="Shape 26"/>
+            <a:off x="5742432" y="4005072"/>
+            <a:ext cx="1828800" cy="512064"/>
+          </a:xfrm>
+          <a:prstGeom prst="rect">
+            <a:avLst/>
+          </a:prstGeom>
+          <a:noFill/>
+          <a:ln/>
+        </p:spPr>
+        <p:txBody>
+          <a:bodyPr wrap="square" lIns="0" tIns="0" rIns="0" bIns="0" rtlCol="0" anchor="ctr"/>
+          <a:lstStyle/>
+          <a:p>
+            <a:pPr indent="0" marL="0">
+              <a:buNone/>
+            </a:pPr>
+            <a:r>
+              <a:rPr lang="en-US" sz="1000" b="1" dirty="0">
+                <a:solidFill>
+                  <a:schemeClr val="tx2"/>
+                </a:solidFill>
+              </a:rPr>
+              <a:t>Gian Valdiris</a:t>
+            </a:r>
+            <a:endParaRPr lang="en-US" sz="1400" dirty="0"/>
+          </a:p>
+          <a:p>
+            <a:pPr indent="0" marL="0">
+              <a:buNone/>
+            </a:pPr>
+            <a:r>
+              <a:rPr lang="en-US" sz="850" b="1" dirty="0">
+                <a:solidFill>
+                  <a:schemeClr val="accent2"/>
+                </a:solidFill>
+              </a:rPr>
+              <a:t>Desarrollador IA</a:t>
+            </a:r>
+            <a:endParaRPr lang="en-US" sz="1400" dirty="0"/>
+          </a:p>
+        </p:txBody>
+      </p:sp>
+      <p:sp>
+        <p:nvSpPr>
+          <p:cNvPr id="31" name="Shape 22"/>
           <p:cNvSpPr/>
           <p:nvPr/>
         </p:nvSpPr>
         <p:spPr>
           <a:xfrm>
-            <a:off x="5370576" y="4544568"/>
+            <a:off x="749808" y="4544568"/>
             <a:ext cx="2200656" cy="896112"/>
           </a:xfrm>
           <a:prstGeom prst="roundRect">
@@ -20460,13 +19554,13 @@
       </p:sp>
       <p:sp>
         <p:nvSpPr>
-          <p:cNvPr id="34" name="Text 27"/>
+          <p:cNvPr id="32" name="Text 23"/>
           <p:cNvSpPr txBox="1"/>
           <p:nvPr/>
         </p:nvSpPr>
         <p:spPr>
           <a:xfrm>
-            <a:off x="5480304" y="4590288"/>
+            <a:off x="859536" y="4590288"/>
             <a:ext cx="1981200" cy="822960"/>
           </a:xfrm>
           <a:prstGeom prst="rect">
@@ -20488,7 +19582,7 @@
                   <a:schemeClr val="accent1"/>
                 </a:solidFill>
               </a:rPr>
-              <a:t>3 · Implementan</a:t>
+              <a:t>1 · Refinan</a:t>
             </a:r>
             <a:endParaRPr lang="en-US" sz="1050" dirty="0"/>
           </a:p>
@@ -20502,7 +19596,7 @@
                   <a:schemeClr val="tx1"/>
                 </a:solidFill>
               </a:rPr>
-              <a:t>Construyen la solución con las prácticas del equipo y la dejan lista para revisión.</a:t>
+              <a:t>Bajan cada historia a diseño técnico con el arquetipo, junto al arquitecto.</a:t>
             </a:r>
             <a:endParaRPr lang="en-US" sz="1050" dirty="0"/>
           </a:p>
@@ -20510,101 +19604,18 @@
       </p:sp>
       <p:sp>
         <p:nvSpPr>
-          <p:cNvPr id="35" name="Text 28"/>
-          <p:cNvSpPr txBox="1"/>
-          <p:nvPr/>
-        </p:nvSpPr>
-        <p:spPr>
-          <a:xfrm>
-            <a:off x="749808" y="5486400"/>
-            <a:ext cx="6821424" cy="365760"/>
-          </a:xfrm>
-          <a:prstGeom prst="rect">
-            <a:avLst/>
-          </a:prstGeom>
-          <a:noFill/>
-          <a:ln/>
-        </p:spPr>
-        <p:txBody>
-          <a:bodyPr wrap="square" lIns="0" tIns="0" rIns="0" bIns="0" rtlCol="0" anchor="ctr"/>
-          <a:lstStyle/>
-          <a:p>
-            <a:pPr indent="0" marL="0">
-              <a:buNone/>
-            </a:pPr>
-            <a:r>
-              <a:rPr lang="en-US" sz="1050" b="1" dirty="0">
-                <a:solidFill>
-                  <a:schemeClr val="tx2"/>
-                </a:solidFill>
-              </a:rPr>
-              <a:t>Un equipo, un backlog: </a:t>
-            </a:r>
-            <a:pPr indent="0" marL="0">
-              <a:buNone/>
-            </a:pPr>
-            <a:r>
-              <a:rPr lang="en-US" sz="1050" dirty="0">
-                <a:solidFill>
-                  <a:schemeClr val="accent6"/>
-                </a:solidFill>
-              </a:rPr>
-              <a:t>siempre se trabaja en la prioridad más alta de SURA, y el conocimiento queda en el equipo, no en una persona.</a:t>
-            </a:r>
-            <a:endParaRPr lang="en-US" sz="1050" dirty="0"/>
-          </a:p>
-        </p:txBody>
-      </p:sp>
-      <p:sp>
-        <p:nvSpPr>
-          <p:cNvPr id="36" name="Text 29"/>
-          <p:cNvSpPr txBox="1"/>
-          <p:nvPr/>
-        </p:nvSpPr>
-        <p:spPr>
-          <a:xfrm>
-            <a:off x="8138160" y="1600200"/>
-            <a:ext cx="3502152" cy="365760"/>
-          </a:xfrm>
-          <a:prstGeom prst="rect">
-            <a:avLst/>
-          </a:prstGeom>
-          <a:noFill/>
-          <a:ln/>
-        </p:spPr>
-        <p:txBody>
-          <a:bodyPr wrap="square" lIns="0" tIns="0" rIns="0" bIns="0" rtlCol="0" anchor="t"/>
-          <a:lstStyle/>
-          <a:p>
-            <a:pPr indent="0" marL="0">
-              <a:buNone/>
-            </a:pPr>
-            <a:r>
-              <a:rPr lang="en-US" sz="1700" b="1" dirty="0">
-                <a:solidFill>
-                  <a:schemeClr val="tx2"/>
-                </a:solidFill>
-              </a:rPr>
-              <a:t>Equipo SURA</a:t>
-            </a:r>
-            <a:endParaRPr lang="en-US" sz="1700" dirty="0"/>
-          </a:p>
-        </p:txBody>
-      </p:sp>
-      <p:sp>
-        <p:nvSpPr>
-          <p:cNvPr id="37" name="Shape 30"/>
+          <p:cNvPr id="33" name="Shape 24"/>
           <p:cNvSpPr/>
           <p:nvPr/>
         </p:nvSpPr>
         <p:spPr>
           <a:xfrm>
-            <a:off x="8138160" y="2057400"/>
-            <a:ext cx="3502152" cy="676656"/>
+            <a:off x="3060192" y="4544568"/>
+            <a:ext cx="2200656" cy="896112"/>
           </a:xfrm>
           <a:prstGeom prst="roundRect">
             <a:avLst>
-              <a:gd name="adj" fmla="val 10811"/>
+              <a:gd name="adj" fmla="val 8163"/>
             </a:avLst>
           </a:prstGeom>
           <a:solidFill>
@@ -20620,68 +19631,68 @@
       </p:sp>
       <p:sp>
         <p:nvSpPr>
-          <p:cNvPr id="38" name="Text 31"/>
+          <p:cNvPr id="34" name="Text 25"/>
           <p:cNvSpPr txBox="1"/>
           <p:nvPr/>
         </p:nvSpPr>
         <p:spPr>
           <a:xfrm>
-            <a:off x="8275320" y="2057400"/>
-            <a:ext cx="3227832" cy="676656"/>
-          </a:xfrm>
-          <a:prstGeom prst="rect">
-            <a:avLst/>
-          </a:prstGeom>
-          <a:noFill/>
-          <a:ln/>
-        </p:spPr>
-        <p:txBody>
-          <a:bodyPr wrap="square" lIns="0" tIns="0" rIns="0" bIns="0" rtlCol="0" anchor="ctr"/>
-          <a:lstStyle/>
-          <a:p>
-            <a:pPr indent="0" marL="0">
-              <a:buNone/>
-            </a:pPr>
-            <a:r>
-              <a:rPr lang="en-US" sz="1200" b="1" dirty="0">
-                <a:solidFill>
-                  <a:schemeClr val="tx2"/>
-                </a:solidFill>
-              </a:rPr>
-              <a:t>Product Owner de SURA</a:t>
-            </a:r>
-            <a:endParaRPr lang="en-US" sz="1200" dirty="0"/>
-          </a:p>
-          <a:p>
-            <a:pPr indent="0" marL="0">
-              <a:buNone/>
-            </a:pPr>
-            <a:r>
-              <a:rPr lang="en-US" sz="1200" dirty="0">
-                <a:solidFill>
-                  <a:schemeClr val="accent6"/>
-                </a:solidFill>
-              </a:rPr>
-              <a:t>define y prioriza las historias, y recibe cada demo</a:t>
-            </a:r>
-            <a:endParaRPr lang="en-US" sz="1200" dirty="0"/>
-          </a:p>
-        </p:txBody>
-      </p:sp>
-      <p:sp>
-        <p:nvSpPr>
-          <p:cNvPr id="39" name="Shape 32"/>
+            <a:off x="3169920" y="4590288"/>
+            <a:ext cx="1981200" cy="822960"/>
+          </a:xfrm>
+          <a:prstGeom prst="rect">
+            <a:avLst/>
+          </a:prstGeom>
+          <a:noFill/>
+          <a:ln/>
+        </p:spPr>
+        <p:txBody>
+          <a:bodyPr wrap="square" lIns="0" tIns="0" rIns="0" bIns="0" rtlCol="0" anchor="t"/>
+          <a:lstStyle/>
+          <a:p>
+            <a:pPr indent="0" marL="0">
+              <a:buNone/>
+            </a:pPr>
+            <a:r>
+              <a:rPr lang="en-US" sz="1050" b="1" dirty="0">
+                <a:solidFill>
+                  <a:schemeClr val="accent1"/>
+                </a:solidFill>
+              </a:rPr>
+              <a:t>2 · Estiman</a:t>
+            </a:r>
+            <a:endParaRPr lang="en-US" sz="1050" dirty="0"/>
+          </a:p>
+          <a:p>
+            <a:pPr indent="0" marL="0">
+              <a:buNone/>
+            </a:pPr>
+            <a:r>
+              <a:rPr lang="en-US" sz="1050" dirty="0">
+                <a:solidFill>
+                  <a:schemeClr val="tx1"/>
+                </a:solidFill>
+              </a:rPr>
+              <a:t>Ponen los puntos de cada historia y la parten si pasa de 13.</a:t>
+            </a:r>
+            <a:endParaRPr lang="en-US" sz="1050" dirty="0"/>
+          </a:p>
+        </p:txBody>
+      </p:sp>
+      <p:sp>
+        <p:nvSpPr>
+          <p:cNvPr id="35" name="Shape 26"/>
           <p:cNvSpPr/>
           <p:nvPr/>
         </p:nvSpPr>
         <p:spPr>
           <a:xfrm>
-            <a:off x="8138160" y="2825496"/>
-            <a:ext cx="3502152" cy="676656"/>
+            <a:off x="5370576" y="4544568"/>
+            <a:ext cx="2200656" cy="896112"/>
           </a:xfrm>
           <a:prstGeom prst="roundRect">
             <a:avLst>
-              <a:gd name="adj" fmla="val 10811"/>
+              <a:gd name="adj" fmla="val 8163"/>
             </a:avLst>
           </a:prstGeom>
           <a:solidFill>
@@ -20697,14 +19708,64 @@
       </p:sp>
       <p:sp>
         <p:nvSpPr>
-          <p:cNvPr id="40" name="Text 33"/>
+          <p:cNvPr id="36" name="Text 27"/>
           <p:cNvSpPr txBox="1"/>
           <p:nvPr/>
         </p:nvSpPr>
         <p:spPr>
           <a:xfrm>
-            <a:off x="8275320" y="2825496"/>
-            <a:ext cx="3227832" cy="676656"/>
+            <a:off x="5480304" y="4590288"/>
+            <a:ext cx="1981200" cy="822960"/>
+          </a:xfrm>
+          <a:prstGeom prst="rect">
+            <a:avLst/>
+          </a:prstGeom>
+          <a:noFill/>
+          <a:ln/>
+        </p:spPr>
+        <p:txBody>
+          <a:bodyPr wrap="square" lIns="0" tIns="0" rIns="0" bIns="0" rtlCol="0" anchor="t"/>
+          <a:lstStyle/>
+          <a:p>
+            <a:pPr indent="0" marL="0">
+              <a:buNone/>
+            </a:pPr>
+            <a:r>
+              <a:rPr lang="en-US" sz="1050" b="1" dirty="0">
+                <a:solidFill>
+                  <a:schemeClr val="accent1"/>
+                </a:solidFill>
+              </a:rPr>
+              <a:t>3 · Implementan</a:t>
+            </a:r>
+            <a:endParaRPr lang="en-US" sz="1050" dirty="0"/>
+          </a:p>
+          <a:p>
+            <a:pPr indent="0" marL="0">
+              <a:buNone/>
+            </a:pPr>
+            <a:r>
+              <a:rPr lang="en-US" sz="1050" dirty="0">
+                <a:solidFill>
+                  <a:schemeClr val="tx1"/>
+                </a:solidFill>
+              </a:rPr>
+              <a:t>Construyen la solución con las prácticas del equipo y la dejan lista para revisión.</a:t>
+            </a:r>
+            <a:endParaRPr lang="en-US" sz="1050" dirty="0"/>
+          </a:p>
+        </p:txBody>
+      </p:sp>
+      <p:sp>
+        <p:nvSpPr>
+          <p:cNvPr id="37" name="Text 28"/>
+          <p:cNvSpPr txBox="1"/>
+          <p:nvPr/>
+        </p:nvSpPr>
+        <p:spPr>
+          <a:xfrm>
+            <a:off x="749808" y="5486400"/>
+            <a:ext cx="6821424" cy="365760"/>
           </a:xfrm>
           <a:prstGeom prst="rect">
             <a:avLst/>
@@ -20720,40 +19781,73 @@
               <a:buNone/>
             </a:pPr>
             <a:r>
-              <a:rPr lang="en-US" sz="1200" b="1" dirty="0">
+              <a:rPr lang="en-US" sz="1050" b="1" dirty="0">
                 <a:solidFill>
                   <a:schemeClr val="tx2"/>
                 </a:solidFill>
               </a:rPr>
-              <a:t>Arquitectura de SURA</a:t>
-            </a:r>
-            <a:endParaRPr lang="en-US" sz="1200" dirty="0"/>
-          </a:p>
-          <a:p>
-            <a:pPr indent="0" marL="0">
-              <a:buNone/>
-            </a:pPr>
-            <a:r>
-              <a:rPr lang="en-US" sz="1200" dirty="0">
+              <a:t>Un equipo, un backlog: </a:t>
+            </a:r>
+            <a:pPr indent="0" marL="0">
+              <a:buNone/>
+            </a:pPr>
+            <a:r>
+              <a:rPr lang="en-US" sz="1050" dirty="0">
                 <a:solidFill>
                   <a:schemeClr val="accent6"/>
                 </a:solidFill>
               </a:rPr>
-              <a:t>acuerda lineamientos y decisiones con nuestro arquitecto</a:t>
-            </a:r>
-            <a:endParaRPr lang="en-US" sz="1200" dirty="0"/>
-          </a:p>
-        </p:txBody>
-      </p:sp>
-      <p:sp>
-        <p:nvSpPr>
-          <p:cNvPr id="41" name="Shape 34"/>
+              <a:t>siempre se trabaja en la prioridad más alta de SURA, y el conocimiento queda en el equipo, no en una persona.</a:t>
+            </a:r>
+            <a:endParaRPr lang="en-US" sz="1050" dirty="0"/>
+          </a:p>
+        </p:txBody>
+      </p:sp>
+      <p:sp>
+        <p:nvSpPr>
+          <p:cNvPr id="38" name="Text 29"/>
+          <p:cNvSpPr txBox="1"/>
+          <p:nvPr/>
+        </p:nvSpPr>
+        <p:spPr>
+          <a:xfrm>
+            <a:off x="8138160" y="1600200"/>
+            <a:ext cx="3502152" cy="365760"/>
+          </a:xfrm>
+          <a:prstGeom prst="rect">
+            <a:avLst/>
+          </a:prstGeom>
+          <a:noFill/>
+          <a:ln/>
+        </p:spPr>
+        <p:txBody>
+          <a:bodyPr wrap="square" lIns="0" tIns="0" rIns="0" bIns="0" rtlCol="0" anchor="t"/>
+          <a:lstStyle/>
+          <a:p>
+            <a:pPr indent="0" marL="0">
+              <a:buNone/>
+            </a:pPr>
+            <a:r>
+              <a:rPr lang="en-US" sz="1700" b="1" dirty="0">
+                <a:solidFill>
+                  <a:schemeClr val="tx2"/>
+                </a:solidFill>
+              </a:rPr>
+              <a:t>Equipo SURA</a:t>
+            </a:r>
+            <a:endParaRPr lang="en-US" sz="1700" dirty="0"/>
+          </a:p>
+        </p:txBody>
+      </p:sp>
+      <p:sp>
+        <p:nvSpPr>
+          <p:cNvPr id="39" name="Shape 30"/>
           <p:cNvSpPr/>
           <p:nvPr/>
         </p:nvSpPr>
         <p:spPr>
           <a:xfrm>
-            <a:off x="8138160" y="3593592"/>
+            <a:off x="8138160" y="2057400"/>
             <a:ext cx="3502152" cy="676656"/>
           </a:xfrm>
           <a:prstGeom prst="roundRect">
@@ -20774,13 +19868,13 @@
       </p:sp>
       <p:sp>
         <p:nvSpPr>
-          <p:cNvPr id="42" name="Text 35"/>
+          <p:cNvPr id="40" name="Text 31"/>
           <p:cNvSpPr txBox="1"/>
           <p:nvPr/>
         </p:nvSpPr>
         <p:spPr>
           <a:xfrm>
-            <a:off x="8275320" y="3593592"/>
+            <a:off x="8275320" y="2057400"/>
             <a:ext cx="3227832" cy="676656"/>
           </a:xfrm>
           <a:prstGeom prst="rect">
@@ -20802,7 +19896,7 @@
                   <a:schemeClr val="tx2"/>
                 </a:solidFill>
               </a:rPr>
-              <a:t>Equipos de front e integración</a:t>
+              <a:t>Product Owner de SURA</a:t>
             </a:r>
             <a:endParaRPr lang="en-US" sz="1200" dirty="0"/>
           </a:p>
@@ -20816,7 +19910,7 @@
                   <a:schemeClr val="accent6"/>
                 </a:solidFill>
               </a:rPr>
-              <a:t>construyen la base donde se integran los agentes</a:t>
+              <a:t>define y prioriza las historias, y recibe cada demo</a:t>
             </a:r>
             <a:endParaRPr lang="en-US" sz="1200" dirty="0"/>
           </a:p>
@@ -20824,13 +19918,13 @@
       </p:sp>
       <p:sp>
         <p:nvSpPr>
-          <p:cNvPr id="43" name="Shape 36"/>
+          <p:cNvPr id="41" name="Shape 32"/>
           <p:cNvSpPr/>
           <p:nvPr/>
         </p:nvSpPr>
         <p:spPr>
           <a:xfrm>
-            <a:off x="8138160" y="4361688"/>
+            <a:off x="8138160" y="2825496"/>
             <a:ext cx="3502152" cy="676656"/>
           </a:xfrm>
           <a:prstGeom prst="roundRect">
@@ -20851,13 +19945,13 @@
       </p:sp>
       <p:sp>
         <p:nvSpPr>
-          <p:cNvPr id="44" name="Text 37"/>
+          <p:cNvPr id="42" name="Text 33"/>
           <p:cNvSpPr txBox="1"/>
           <p:nvPr/>
         </p:nvSpPr>
         <p:spPr>
           <a:xfrm>
-            <a:off x="8275320" y="4361688"/>
+            <a:off x="8275320" y="2825496"/>
             <a:ext cx="3227832" cy="676656"/>
           </a:xfrm>
           <a:prstGeom prst="rect">
@@ -20879,7 +19973,7 @@
                   <a:schemeClr val="tx2"/>
                 </a:solidFill>
               </a:rPr>
-              <a:t>Core SuraHis y plataforma agéntica</a:t>
+              <a:t>Arquitectura de SURA</a:t>
             </a:r>
             <a:endParaRPr lang="en-US" sz="1200" dirty="0"/>
           </a:p>
@@ -20893,7 +19987,7 @@
                   <a:schemeClr val="accent6"/>
                 </a:solidFill>
               </a:rPr>
-              <a:t>exponen reglas, histórico, gateways y modelos</a:t>
+              <a:t>acuerda lineamientos y decisiones con nuestro arquitecto</a:t>
             </a:r>
             <a:endParaRPr lang="en-US" sz="1200" dirty="0"/>
           </a:p>
@@ -20901,13 +19995,13 @@
       </p:sp>
       <p:sp>
         <p:nvSpPr>
-          <p:cNvPr id="45" name="Shape 38"/>
+          <p:cNvPr id="43" name="Shape 34"/>
           <p:cNvSpPr/>
           <p:nvPr/>
         </p:nvSpPr>
         <p:spPr>
           <a:xfrm>
-            <a:off x="8138160" y="5129784"/>
+            <a:off x="8138160" y="3593592"/>
             <a:ext cx="3502152" cy="676656"/>
           </a:xfrm>
           <a:prstGeom prst="roundRect">
@@ -20928,7 +20022,161 @@
       </p:sp>
       <p:sp>
         <p:nvSpPr>
-          <p:cNvPr id="46" name="Text 39"/>
+          <p:cNvPr id="44" name="Text 35"/>
+          <p:cNvSpPr txBox="1"/>
+          <p:nvPr/>
+        </p:nvSpPr>
+        <p:spPr>
+          <a:xfrm>
+            <a:off x="8275320" y="3593592"/>
+            <a:ext cx="3227832" cy="676656"/>
+          </a:xfrm>
+          <a:prstGeom prst="rect">
+            <a:avLst/>
+          </a:prstGeom>
+          <a:noFill/>
+          <a:ln/>
+        </p:spPr>
+        <p:txBody>
+          <a:bodyPr wrap="square" lIns="0" tIns="0" rIns="0" bIns="0" rtlCol="0" anchor="ctr"/>
+          <a:lstStyle/>
+          <a:p>
+            <a:pPr indent="0" marL="0">
+              <a:buNone/>
+            </a:pPr>
+            <a:r>
+              <a:rPr lang="en-US" sz="1200" b="1" dirty="0">
+                <a:solidFill>
+                  <a:schemeClr val="tx2"/>
+                </a:solidFill>
+              </a:rPr>
+              <a:t>Equipos de front e integración</a:t>
+            </a:r>
+            <a:endParaRPr lang="en-US" sz="1200" dirty="0"/>
+          </a:p>
+          <a:p>
+            <a:pPr indent="0" marL="0">
+              <a:buNone/>
+            </a:pPr>
+            <a:r>
+              <a:rPr lang="en-US" sz="1200" dirty="0">
+                <a:solidFill>
+                  <a:schemeClr val="accent6"/>
+                </a:solidFill>
+              </a:rPr>
+              <a:t>construyen la base donde se integran los agentes</a:t>
+            </a:r>
+            <a:endParaRPr lang="en-US" sz="1200" dirty="0"/>
+          </a:p>
+        </p:txBody>
+      </p:sp>
+      <p:sp>
+        <p:nvSpPr>
+          <p:cNvPr id="45" name="Shape 36"/>
+          <p:cNvSpPr/>
+          <p:nvPr/>
+        </p:nvSpPr>
+        <p:spPr>
+          <a:xfrm>
+            <a:off x="8138160" y="4361688"/>
+            <a:ext cx="3502152" cy="676656"/>
+          </a:xfrm>
+          <a:prstGeom prst="roundRect">
+            <a:avLst>
+              <a:gd name="adj" fmla="val 10811"/>
+            </a:avLst>
+          </a:prstGeom>
+          <a:solidFill>
+            <a:schemeClr val="bg1"/>
+          </a:solidFill>
+          <a:ln w="12700">
+            <a:solidFill>
+              <a:srgbClr val="DCD8EC"/>
+            </a:solidFill>
+            <a:prstDash val="solid"/>
+          </a:ln>
+        </p:spPr>
+      </p:sp>
+      <p:sp>
+        <p:nvSpPr>
+          <p:cNvPr id="46" name="Text 37"/>
+          <p:cNvSpPr txBox="1"/>
+          <p:nvPr/>
+        </p:nvSpPr>
+        <p:spPr>
+          <a:xfrm>
+            <a:off x="8275320" y="4361688"/>
+            <a:ext cx="3227832" cy="676656"/>
+          </a:xfrm>
+          <a:prstGeom prst="rect">
+            <a:avLst/>
+          </a:prstGeom>
+          <a:noFill/>
+          <a:ln/>
+        </p:spPr>
+        <p:txBody>
+          <a:bodyPr wrap="square" lIns="0" tIns="0" rIns="0" bIns="0" rtlCol="0" anchor="ctr"/>
+          <a:lstStyle/>
+          <a:p>
+            <a:pPr indent="0" marL="0">
+              <a:buNone/>
+            </a:pPr>
+            <a:r>
+              <a:rPr lang="en-US" sz="1200" b="1" dirty="0">
+                <a:solidFill>
+                  <a:schemeClr val="tx2"/>
+                </a:solidFill>
+              </a:rPr>
+              <a:t>Core SuraHis y plataforma agéntica</a:t>
+            </a:r>
+            <a:endParaRPr lang="en-US" sz="1200" dirty="0"/>
+          </a:p>
+          <a:p>
+            <a:pPr indent="0" marL="0">
+              <a:buNone/>
+            </a:pPr>
+            <a:r>
+              <a:rPr lang="en-US" sz="1200" dirty="0">
+                <a:solidFill>
+                  <a:schemeClr val="accent6"/>
+                </a:solidFill>
+              </a:rPr>
+              <a:t>exponen reglas, histórico, gateways y modelos</a:t>
+            </a:r>
+            <a:endParaRPr lang="en-US" sz="1200" dirty="0"/>
+          </a:p>
+        </p:txBody>
+      </p:sp>
+      <p:sp>
+        <p:nvSpPr>
+          <p:cNvPr id="47" name="Shape 38"/>
+          <p:cNvSpPr/>
+          <p:nvPr/>
+        </p:nvSpPr>
+        <p:spPr>
+          <a:xfrm>
+            <a:off x="8138160" y="5129784"/>
+            <a:ext cx="3502152" cy="676656"/>
+          </a:xfrm>
+          <a:prstGeom prst="roundRect">
+            <a:avLst>
+              <a:gd name="adj" fmla="val 10811"/>
+            </a:avLst>
+          </a:prstGeom>
+          <a:solidFill>
+            <a:schemeClr val="bg1"/>
+          </a:solidFill>
+          <a:ln w="12700">
+            <a:solidFill>
+              <a:srgbClr val="DCD8EC"/>
+            </a:solidFill>
+            <a:prstDash val="solid"/>
+          </a:ln>
+        </p:spPr>
+      </p:sp>
+      <p:sp>
+        <p:nvSpPr>
+          <p:cNvPr id="48" name="Text 39"/>
           <p:cNvSpPr txBox="1"/>
           <p:nvPr/>
         </p:nvSpPr>
